--- a/slides/pptx/lecture02_training.pptx
+++ b/slides/pptx/lecture02_training.pptx
@@ -3282,7 +3282,7 @@
         <p:spPr>
           <a:xfrm>
             <a:off x="548640" y="5978374"/>
-            <a:ext cx="11091672" cy="457200"/>
+            <a:ext cx="11091672" cy="548513"/>
           </a:xfrm>
         </p:spPr>
         <p:style>
@@ -4306,7 +4306,7 @@
         </p:blipFill>
         <p:spPr>
           <a:xfrm>
-            <a:off x="2232562" y="1464564"/>
+            <a:off x="2232562" y="1914144"/>
             <a:ext cx="7147756" cy="3657600"/>
           </a:xfrm>
           <a:prstGeom prst="rect">
@@ -4613,7 +4613,7 @@
         <p:spPr>
           <a:xfrm>
             <a:off x="548640" y="731520"/>
-            <a:ext cx="11064240" cy="1005840"/>
+            <a:ext cx="11064240" cy="685800"/>
           </a:xfrm>
           <a:prstGeom prst="rect">
             <a:avLst/>
@@ -7376,7 +7376,7 @@
         <p:spPr>
           <a:xfrm>
             <a:off x="548640" y="1920240"/>
-            <a:ext cx="10789920" cy="3262432"/>
+            <a:ext cx="10789920" cy="3828288"/>
           </a:xfrm>
           <a:prstGeom prst="rect">
             <a:avLst/>
@@ -7649,7 +7649,11 @@
             <p:ph type="title"/>
           </p:nvPr>
         </p:nvSpPr>
-        <p:spPr/>
+        <p:spPr>
+          <a:xfrm>
+            <a:ext cx="0" cy="1481328"/>
+          </a:xfrm>
+        </p:spPr>
         <p:txBody>
           <a:bodyPr/>
           <a:lstStyle/>
@@ -9076,7 +9080,7 @@
         <p:spPr>
           <a:xfrm>
             <a:off x="548640" y="731520"/>
-            <a:ext cx="11064240" cy="1005840"/>
+            <a:ext cx="11064240" cy="561552"/>
           </a:xfrm>
           <a:prstGeom prst="rect">
             <a:avLst/>
@@ -10168,8 +10172,8 @@
         </p:nvSpPr>
         <p:spPr>
           <a:xfrm>
-            <a:off x="4005477" y="2073403"/>
-            <a:ext cx="3558540" cy="984885"/>
+            <a:off x="4005477" y="2382478"/>
+            <a:ext cx="3558540" cy="1664588"/>
           </a:xfrm>
           <a:prstGeom prst="rect">
             <a:avLst/>
@@ -10459,7 +10463,7 @@
         <p:spPr>
           <a:xfrm>
             <a:off x="1477250" y="1347936"/>
-            <a:ext cx="9483193" cy="443070"/>
+            <a:ext cx="9483193" cy="979678"/>
           </a:xfrm>
           <a:prstGeom prst="rect">
             <a:avLst/>
@@ -10807,7 +10811,7 @@
         <p:spPr>
           <a:xfrm>
             <a:off x="498159" y="2593386"/>
-            <a:ext cx="784225" cy="758825"/>
+            <a:ext cx="784225" cy="1137158"/>
           </a:xfrm>
           <a:prstGeom prst="rect">
             <a:avLst/>
@@ -11068,8 +11072,8 @@
         </p:nvSpPr>
         <p:spPr>
           <a:xfrm>
-            <a:off x="1649159" y="2624025"/>
-            <a:ext cx="784225" cy="758825"/>
+            <a:off x="1649159" y="3927679"/>
+            <a:ext cx="784225" cy="1137158"/>
           </a:xfrm>
           <a:prstGeom prst="rect">
             <a:avLst/>
@@ -11552,7 +11556,7 @@
         <p:spPr>
           <a:xfrm>
             <a:off x="3478214" y="5610456"/>
-            <a:ext cx="1314450" cy="391160"/>
+            <a:ext cx="1314450" cy="1140968"/>
           </a:xfrm>
           <a:prstGeom prst="rect">
             <a:avLst/>
@@ -11624,7 +11628,7 @@
         <p:spPr>
           <a:xfrm>
             <a:off x="5374324" y="5021582"/>
-            <a:ext cx="2379345" cy="878840"/>
+            <a:ext cx="2379345" cy="1322578"/>
           </a:xfrm>
           <a:prstGeom prst="rect">
             <a:avLst/>
@@ -11893,8 +11897,8 @@
         </p:nvSpPr>
         <p:spPr>
           <a:xfrm>
-            <a:off x="4135439" y="2398432"/>
-            <a:ext cx="4151629" cy="957580"/>
+            <a:off x="4135439" y="3927679"/>
+            <a:ext cx="4151629" cy="1244473"/>
           </a:xfrm>
           <a:prstGeom prst="rect">
             <a:avLst/>
@@ -12016,7 +12020,7 @@
         </p:nvSpPr>
         <p:spPr>
           <a:xfrm>
-            <a:off x="4720019" y="3496007"/>
+            <a:off x="4720019" y="3927679"/>
             <a:ext cx="897255" cy="391160"/>
           </a:xfrm>
           <a:prstGeom prst="rect">
@@ -12204,7 +12208,7 @@
         </p:nvSpPr>
         <p:spPr>
           <a:xfrm>
-            <a:off x="1501839" y="1277318"/>
+            <a:off x="1501839" y="3007184"/>
             <a:ext cx="8377428" cy="865631"/>
           </a:xfrm>
           <a:prstGeom prst="rect">
@@ -12323,7 +12327,7 @@
         <p:spPr>
           <a:xfrm>
             <a:off x="1664068" y="926797"/>
-            <a:ext cx="8844737" cy="1258037"/>
+            <a:ext cx="8844737" cy="2025523"/>
           </a:xfrm>
           <a:prstGeom prst="rect">
             <a:avLst/>
@@ -13650,8 +13654,8 @@
         </p:nvSpPr>
         <p:spPr>
           <a:xfrm>
-            <a:off x="3924221" y="4387953"/>
-            <a:ext cx="4046220" cy="1031240"/>
+            <a:off x="3924221" y="4299712"/>
+            <a:ext cx="4046220" cy="2512568"/>
           </a:xfrm>
           <a:prstGeom prst="rect">
             <a:avLst/>
@@ -14043,7 +14047,7 @@
         <p:spPr>
           <a:xfrm>
             <a:off x="5600620" y="2468842"/>
-            <a:ext cx="2824839" cy="382156"/>
+            <a:ext cx="2824839" cy="775208"/>
           </a:xfrm>
           <a:prstGeom prst="rect">
             <a:avLst/>

--- a/slides/pptx/lecture02_training.pptx
+++ b/slides/pptx/lecture02_training.pptx
@@ -7649,11 +7649,7 @@
             <p:ph type="title"/>
           </p:nvPr>
         </p:nvSpPr>
-        <p:spPr>
-          <a:xfrm>
-            <a:ext cx="0" cy="1481328"/>
-          </a:xfrm>
-        </p:spPr>
+        <p:spPr/>
         <p:txBody>
           <a:bodyPr/>
           <a:lstStyle/>
@@ -7744,7 +7740,7 @@
         </p:blipFill>
         <p:spPr>
           <a:xfrm>
-            <a:off x="3847070" y="1611243"/>
+            <a:off x="3847070" y="1783080"/>
             <a:ext cx="6495535" cy="3151562"/>
           </a:xfrm>
           <a:prstGeom prst="rect">
@@ -11072,8 +11068,8 @@
         </p:nvSpPr>
         <p:spPr>
           <a:xfrm>
-            <a:off x="1649159" y="3927679"/>
-            <a:ext cx="784225" cy="1137158"/>
+            <a:off x="1649159" y="2624025"/>
+            <a:ext cx="784225" cy="758825"/>
           </a:xfrm>
           <a:prstGeom prst="rect">
             <a:avLst/>
@@ -11556,7 +11552,7 @@
         <p:spPr>
           <a:xfrm>
             <a:off x="3478214" y="5610456"/>
-            <a:ext cx="1314450" cy="1140968"/>
+            <a:ext cx="1314450" cy="391160"/>
           </a:xfrm>
           <a:prstGeom prst="rect">
             <a:avLst/>
@@ -11628,7 +11624,7 @@
         <p:spPr>
           <a:xfrm>
             <a:off x="5374324" y="5021582"/>
-            <a:ext cx="2379345" cy="1322578"/>
+            <a:ext cx="2379345" cy="878840"/>
           </a:xfrm>
           <a:prstGeom prst="rect">
             <a:avLst/>
@@ -11897,8 +11893,8 @@
         </p:nvSpPr>
         <p:spPr>
           <a:xfrm>
-            <a:off x="4135439" y="3927679"/>
-            <a:ext cx="4151629" cy="1244473"/>
+            <a:off x="4135439" y="2398432"/>
+            <a:ext cx="4151629" cy="957580"/>
           </a:xfrm>
           <a:prstGeom prst="rect">
             <a:avLst/>
@@ -12020,7 +12016,7 @@
         </p:nvSpPr>
         <p:spPr>
           <a:xfrm>
-            <a:off x="4720019" y="3927679"/>
+            <a:off x="4720019" y="3496007"/>
             <a:ext cx="897255" cy="391160"/>
           </a:xfrm>
           <a:prstGeom prst="rect">
@@ -12208,7 +12204,7 @@
         </p:nvSpPr>
         <p:spPr>
           <a:xfrm>
-            <a:off x="1501839" y="3007184"/>
+            <a:off x="1501839" y="1277318"/>
             <a:ext cx="8377428" cy="865631"/>
           </a:xfrm>
           <a:prstGeom prst="rect">
@@ -12327,7 +12323,7 @@
         <p:spPr>
           <a:xfrm>
             <a:off x="1664068" y="926797"/>
-            <a:ext cx="8844737" cy="2025523"/>
+            <a:ext cx="8844737" cy="1258037"/>
           </a:xfrm>
           <a:prstGeom prst="rect">
             <a:avLst/>
@@ -13654,8 +13650,8 @@
         </p:nvSpPr>
         <p:spPr>
           <a:xfrm>
-            <a:off x="3924221" y="4299712"/>
-            <a:ext cx="4046220" cy="2512568"/>
+            <a:off x="3924221" y="4387953"/>
+            <a:ext cx="4046220" cy="1031240"/>
           </a:xfrm>
           <a:prstGeom prst="rect">
             <a:avLst/>
@@ -14047,7 +14043,7 @@
         <p:spPr>
           <a:xfrm>
             <a:off x="5600620" y="2468842"/>
-            <a:ext cx="2824839" cy="775208"/>
+            <a:ext cx="2824839" cy="382156"/>
           </a:xfrm>
           <a:prstGeom prst="rect">
             <a:avLst/>

--- a/slides/pptx/lecture02_training.pptx
+++ b/slides/pptx/lecture02_training.pptx
@@ -466,11 +466,20 @@
           <a:lstStyle/>
           <a:p>
             <a:r>
-              <a:t>The conceptual key — do not rush it. Backprop sounds fearsome but it is one move repeated: to find how much the loss cares about a given weight, walk the path from the loss back to that weight and multiply one small "local slope" at each arrow. The shared starting signal is the same for every weight: the loss's slope with respect to the error is 2×error (the slope of a squared-error bowl is twice the error — our only "derivative = slope" fact today). What differs per weight is the rest of the path. Name it once so they recognise the term later: multiplying local slopes along a path is precisely the chain rule; we just never write the symbols.</a:t>
-            </a:r>
-          </a:p>
-          <a:p>
-            <a:endParaRPr/>
+              <a:rPr dirty="0"/>
+              <a:t>The conceptual key — do not rush it. Backprop sounds fearsome but it is one move repeated: to find how much the loss cares about a given weight, walk the path from the loss back to that weight and multiply one small "local slope" at each arrow. The shared starting signal is the same for every weight: the loss's slope with respect to the error is 2×error (the slope of a squared-error bowl is twice the error — our only "derivative = slope" fact today). What differs per weight is the rest of the path. Name it once so they </a:t>
+            </a:r>
+            <a:r>
+              <a:rPr dirty="0" err="1"/>
+              <a:t>recognise</a:t>
+            </a:r>
+            <a:r>
+              <a:rPr dirty="0"/>
+              <a:t> the term later: multiplying local slopes along a path is precisely the chain rule; we just never write the symbols.</a:t>
+            </a:r>
+          </a:p>
+          <a:p>
+            <a:endParaRPr dirty="0"/>
           </a:p>
         </p:txBody>
       </p:sp>
@@ -1561,11 +1570,20 @@
           <a:lstStyle/>
           <a:p>
             <a:r>
-              <a:t>I-DO — the engine of all deep learning, with zero calculus. Height = loss, horizontal = a weight's value. The slope at the ball's feet points uphill; subtract a bit of it and you move downhill, toward lower loss. Read the update rule aloud twice — new weight = old weight − lr × slope — because it is literally the last line of the training loop and Quiz 2 Q2. "Gradient" is just our fancy word for "the slope of the loss with respect to a weight"; keep translating it back to "slope." Honesty note: real loss surfaces live in millions of dimensions — the picture is faithful, we just cannot draw a million axes. Next: how big a step? That is the learning rate.</a:t>
-            </a:r>
-          </a:p>
-          <a:p>
-            <a:endParaRPr/>
+              <a:rPr dirty="0"/>
+              <a:t>I-DO — the engine of all deep learning, with zero calculus. Height = loss, horizontal = a weight's value. The slope at the ball's feet points uphill; subtract a bit of it and you move downhill, toward lower loss. Read the update rule aloud twice — new weight = old weight − </a:t>
+            </a:r>
+            <a:r>
+              <a:rPr dirty="0" err="1"/>
+              <a:t>lr</a:t>
+            </a:r>
+            <a:r>
+              <a:rPr dirty="0"/>
+              <a:t> × slope — because it is literally the last line of the training loop and Quiz 2 Q2. "Gradient" is just our fancy word for "the slope of the loss with respect to a weight"; keep translating it back to "slope." Honesty note: real loss surfaces live in millions of dimensions — the picture is faithful, we just cannot draw a million axes. Next: how big a step? That is the learning rate.</a:t>
+            </a:r>
+          </a:p>
+          <a:p>
+            <a:endParaRPr dirty="0"/>
           </a:p>
         </p:txBody>
       </p:sp>
@@ -1652,11 +1670,20 @@
           <a:lstStyle/>
           <a:p>
             <a:r>
-              <a:t>I-DO — the engine of all deep learning, with zero calculus. Height = loss, horizontal = a weight's value. The slope at the ball's feet points uphill; subtract a bit of it and you move downhill, toward lower loss. Read the update rule aloud twice — new weight = old weight − lr × slope — because it is literally the last line of the training loop and Quiz 2 Q2. "Gradient" is just our fancy word for "the slope of the loss with respect to a weight"; keep translating it back to "slope." Honesty note: real loss surfaces live in millions of dimensions — the picture is faithful, we just cannot draw a million axes. Next: how big a step? That is the learning rate.</a:t>
-            </a:r>
-          </a:p>
-          <a:p>
-            <a:endParaRPr/>
+              <a:rPr dirty="0"/>
+              <a:t>I-DO — the engine of all deep learning, with zero calculus. Height = loss, horizontal = a weight's value. The slope at the ball's feet points uphill; subtract a bit of it and you move downhill, toward lower loss. Read the update rule aloud twice — new weight = old weight − </a:t>
+            </a:r>
+            <a:r>
+              <a:rPr dirty="0" err="1"/>
+              <a:t>lr</a:t>
+            </a:r>
+            <a:r>
+              <a:rPr dirty="0"/>
+              <a:t> × slope — because it is literally the last line of the training loop and Quiz 2 Q2. "Gradient" is just our fancy word for "the slope of the loss with respect to a weight"; keep translating it back to "slope." Honesty note: real loss surfaces live in millions of dimensions — the picture is faithful, we just cannot draw a million axes. Next: how big a step? That is the learning rate.</a:t>
+            </a:r>
+          </a:p>
+          <a:p>
+            <a:endParaRPr dirty="0"/>
           </a:p>
         </p:txBody>
       </p:sp>
@@ -3301,7 +3328,7 @@
         </p:style>
         <p:txBody>
           <a:bodyPr>
-            <a:normAutofit fontScale="92500" lnSpcReduction="10000"/>
+            <a:normAutofit/>
           </a:bodyPr>
           <a:lstStyle/>
           <a:p>
@@ -4300,18 +4327,24 @@
         </p:nvPicPr>
         <p:blipFill>
           <a:blip r:embed="rId3"/>
+          <a:srcRect t="8127" b="48029"/>
           <a:stretch>
             <a:fillRect/>
           </a:stretch>
         </p:blipFill>
         <p:spPr>
           <a:xfrm>
-            <a:off x="2232562" y="1914144"/>
-            <a:ext cx="7147756" cy="3657600"/>
+            <a:off x="2986325" y="1920240"/>
+            <a:ext cx="7147756" cy="1554480"/>
           </a:xfrm>
           <a:prstGeom prst="rect">
             <a:avLst/>
           </a:prstGeom>
+          <a:ln>
+            <a:solidFill>
+              <a:schemeClr val="accent1"/>
+            </a:solidFill>
+          </a:ln>
         </p:spPr>
       </p:pic>
       <p:sp>
@@ -4408,7 +4441,7 @@
         </p:blipFill>
         <p:spPr>
           <a:xfrm>
-            <a:off x="1052046" y="3566160"/>
+            <a:off x="899161" y="3706368"/>
             <a:ext cx="9965987" cy="1920240"/>
           </a:xfrm>
           <a:prstGeom prst="rect">
@@ -4550,6 +4583,229 @@
   <p:clrMapOvr>
     <a:masterClrMapping/>
   </p:clrMapOvr>
+  <p:timing>
+    <p:tnLst>
+      <p:par>
+        <p:cTn id="1" dur="indefinite" restart="never" nodeType="tmRoot">
+          <p:childTnLst>
+            <p:seq concurrent="1" nextAc="seek">
+              <p:cTn id="2" dur="indefinite" nodeType="mainSeq">
+                <p:childTnLst>
+                  <p:par>
+                    <p:cTn id="3" fill="hold">
+                      <p:stCondLst>
+                        <p:cond delay="indefinite"/>
+                      </p:stCondLst>
+                      <p:childTnLst>
+                        <p:par>
+                          <p:cTn id="4" fill="hold">
+                            <p:stCondLst>
+                              <p:cond delay="0"/>
+                            </p:stCondLst>
+                            <p:childTnLst>
+                              <p:par>
+                                <p:cTn id="5" presetID="1" presetClass="entr" presetSubtype="0" fill="hold" nodeType="clickEffect">
+                                  <p:stCondLst>
+                                    <p:cond delay="0"/>
+                                  </p:stCondLst>
+                                  <p:childTnLst>
+                                    <p:set>
+                                      <p:cBhvr>
+                                        <p:cTn id="6" dur="1" fill="hold">
+                                          <p:stCondLst>
+                                            <p:cond delay="0"/>
+                                          </p:stCondLst>
+                                        </p:cTn>
+                                        <p:tgtEl>
+                                          <p:spTgt spid="7"/>
+                                        </p:tgtEl>
+                                        <p:attrNameLst>
+                                          <p:attrName>style.visibility</p:attrName>
+                                        </p:attrNameLst>
+                                      </p:cBhvr>
+                                      <p:to>
+                                        <p:strVal val="visible"/>
+                                      </p:to>
+                                    </p:set>
+                                  </p:childTnLst>
+                                </p:cTn>
+                              </p:par>
+                            </p:childTnLst>
+                          </p:cTn>
+                        </p:par>
+                      </p:childTnLst>
+                    </p:cTn>
+                  </p:par>
+                  <p:par>
+                    <p:cTn id="7" fill="hold">
+                      <p:stCondLst>
+                        <p:cond delay="indefinite"/>
+                      </p:stCondLst>
+                      <p:childTnLst>
+                        <p:par>
+                          <p:cTn id="8" fill="hold">
+                            <p:stCondLst>
+                              <p:cond delay="0"/>
+                            </p:stCondLst>
+                            <p:childTnLst>
+                              <p:par>
+                                <p:cTn id="9" presetID="1" presetClass="entr" presetSubtype="0" fill="hold" grpId="0" nodeType="clickEffect">
+                                  <p:stCondLst>
+                                    <p:cond delay="0"/>
+                                  </p:stCondLst>
+                                  <p:childTnLst>
+                                    <p:set>
+                                      <p:cBhvr>
+                                        <p:cTn id="10" dur="1" fill="hold">
+                                          <p:stCondLst>
+                                            <p:cond delay="0"/>
+                                          </p:stCondLst>
+                                        </p:cTn>
+                                        <p:tgtEl>
+                                          <p:spTgt spid="10"/>
+                                        </p:tgtEl>
+                                        <p:attrNameLst>
+                                          <p:attrName>style.visibility</p:attrName>
+                                        </p:attrNameLst>
+                                      </p:cBhvr>
+                                      <p:to>
+                                        <p:strVal val="visible"/>
+                                      </p:to>
+                                    </p:set>
+                                  </p:childTnLst>
+                                </p:cTn>
+                              </p:par>
+                              <p:par>
+                                <p:cTn id="11" presetID="1" presetClass="entr" presetSubtype="0" fill="hold" nodeType="withEffect">
+                                  <p:stCondLst>
+                                    <p:cond delay="0"/>
+                                  </p:stCondLst>
+                                  <p:childTnLst>
+                                    <p:set>
+                                      <p:cBhvr>
+                                        <p:cTn id="12" dur="1" fill="hold">
+                                          <p:stCondLst>
+                                            <p:cond delay="0"/>
+                                          </p:stCondLst>
+                                        </p:cTn>
+                                        <p:tgtEl>
+                                          <p:spTgt spid="9"/>
+                                        </p:tgtEl>
+                                        <p:attrNameLst>
+                                          <p:attrName>style.visibility</p:attrName>
+                                        </p:attrNameLst>
+                                      </p:cBhvr>
+                                      <p:to>
+                                        <p:strVal val="visible"/>
+                                      </p:to>
+                                    </p:set>
+                                  </p:childTnLst>
+                                </p:cTn>
+                              </p:par>
+                              <p:par>
+                                <p:cTn id="13" presetID="1" presetClass="entr" presetSubtype="0" fill="hold" nodeType="withEffect">
+                                  <p:stCondLst>
+                                    <p:cond delay="0"/>
+                                  </p:stCondLst>
+                                  <p:childTnLst>
+                                    <p:set>
+                                      <p:cBhvr>
+                                        <p:cTn id="14" dur="1" fill="hold">
+                                          <p:stCondLst>
+                                            <p:cond delay="0"/>
+                                          </p:stCondLst>
+                                        </p:cTn>
+                                        <p:tgtEl>
+                                          <p:spTgt spid="5"/>
+                                        </p:tgtEl>
+                                        <p:attrNameLst>
+                                          <p:attrName>style.visibility</p:attrName>
+                                        </p:attrNameLst>
+                                      </p:cBhvr>
+                                      <p:to>
+                                        <p:strVal val="visible"/>
+                                      </p:to>
+                                    </p:set>
+                                  </p:childTnLst>
+                                </p:cTn>
+                              </p:par>
+                            </p:childTnLst>
+                          </p:cTn>
+                        </p:par>
+                      </p:childTnLst>
+                    </p:cTn>
+                  </p:par>
+                  <p:par>
+                    <p:cTn id="15" fill="hold">
+                      <p:stCondLst>
+                        <p:cond delay="indefinite"/>
+                      </p:stCondLst>
+                      <p:childTnLst>
+                        <p:par>
+                          <p:cTn id="16" fill="hold">
+                            <p:stCondLst>
+                              <p:cond delay="0"/>
+                            </p:stCondLst>
+                            <p:childTnLst>
+                              <p:par>
+                                <p:cTn id="17" presetID="1" presetClass="entr" presetSubtype="0" fill="hold" grpId="0" nodeType="clickEffect">
+                                  <p:stCondLst>
+                                    <p:cond delay="0"/>
+                                  </p:stCondLst>
+                                  <p:childTnLst>
+                                    <p:set>
+                                      <p:cBhvr>
+                                        <p:cTn id="18" dur="1" fill="hold">
+                                          <p:stCondLst>
+                                            <p:cond delay="0"/>
+                                          </p:stCondLst>
+                                        </p:cTn>
+                                        <p:tgtEl>
+                                          <p:spTgt spid="6"/>
+                                        </p:tgtEl>
+                                        <p:attrNameLst>
+                                          <p:attrName>style.visibility</p:attrName>
+                                        </p:attrNameLst>
+                                      </p:cBhvr>
+                                      <p:to>
+                                        <p:strVal val="visible"/>
+                                      </p:to>
+                                    </p:set>
+                                  </p:childTnLst>
+                                </p:cTn>
+                              </p:par>
+                            </p:childTnLst>
+                          </p:cTn>
+                        </p:par>
+                      </p:childTnLst>
+                    </p:cTn>
+                  </p:par>
+                </p:childTnLst>
+              </p:cTn>
+              <p:prevCondLst>
+                <p:cond evt="onPrev" delay="0">
+                  <p:tgtEl>
+                    <p:sldTgt/>
+                  </p:tgtEl>
+                </p:cond>
+              </p:prevCondLst>
+              <p:nextCondLst>
+                <p:cond evt="onNext" delay="0">
+                  <p:tgtEl>
+                    <p:sldTgt/>
+                  </p:tgtEl>
+                </p:cond>
+              </p:nextCondLst>
+            </p:seq>
+          </p:childTnLst>
+        </p:cTn>
+      </p:par>
+    </p:tnLst>
+    <p:bldLst>
+      <p:bldP spid="6" grpId="0" animBg="1"/>
+      <p:bldP spid="10" grpId="0"/>
+    </p:bldLst>
+  </p:timing>
 </p:sld>
 </file>
 
@@ -7125,7 +7381,7 @@
         <p:spPr>
           <a:xfrm>
             <a:off x="548640" y="731520"/>
-            <a:ext cx="11064240" cy="1127760"/>
+            <a:ext cx="11064240" cy="615553"/>
           </a:xfrm>
           <a:prstGeom prst="rect">
             <a:avLst/>
@@ -7139,14 +7395,20 @@
           <a:lstStyle/>
           <a:p>
             <a:r>
-              <a:rPr sz="3400" b="1" i="0">
+              <a:rPr lang="en-US" sz="3400" b="1" i="0" dirty="0">
                 <a:solidFill>
                   <a:srgbClr val="1B2025"/>
                 </a:solidFill>
                 <a:latin typeface="Avenir Next"/>
               </a:rPr>
-              <a:t>Run the five lines for 20 epochs — watch the loss fall</a:t>
-            </a:r>
+              <a:t>Ideal Loss Fall</a:t>
+            </a:r>
+            <a:endParaRPr sz="3400" b="1" i="0" dirty="0">
+              <a:solidFill>
+                <a:srgbClr val="1B2025"/>
+              </a:solidFill>
+              <a:latin typeface="Avenir Next"/>
+            </a:endParaRPr>
           </a:p>
         </p:txBody>
       </p:sp>
@@ -7714,7 +7976,10 @@
           <a:bodyPr/>
           <a:lstStyle/>
           <a:p>
-            <a:endParaRPr lang="en-US"/>
+            <a:r>
+              <a:rPr lang="en-US" dirty="0"/>
+              <a:t>Deep learning training</a:t>
+            </a:r>
           </a:p>
         </p:txBody>
       </p:sp>
@@ -8109,6 +8374,150 @@
                       </p:childTnLst>
                     </p:cTn>
                   </p:par>
+                  <p:par>
+                    <p:cTn id="7" fill="hold">
+                      <p:stCondLst>
+                        <p:cond delay="indefinite"/>
+                      </p:stCondLst>
+                      <p:childTnLst>
+                        <p:par>
+                          <p:cTn id="8" fill="hold">
+                            <p:stCondLst>
+                              <p:cond delay="0"/>
+                            </p:stCondLst>
+                            <p:childTnLst>
+                              <p:par>
+                                <p:cTn id="9" presetID="1" presetClass="entr" presetSubtype="0" fill="hold" nodeType="clickEffect">
+                                  <p:stCondLst>
+                                    <p:cond delay="0"/>
+                                  </p:stCondLst>
+                                  <p:childTnLst>
+                                    <p:set>
+                                      <p:cBhvr>
+                                        <p:cTn id="10" dur="1" fill="hold">
+                                          <p:stCondLst>
+                                            <p:cond delay="0"/>
+                                          </p:stCondLst>
+                                        </p:cTn>
+                                        <p:tgtEl>
+                                          <p:spTgt spid="5"/>
+                                        </p:tgtEl>
+                                        <p:attrNameLst>
+                                          <p:attrName>style.visibility</p:attrName>
+                                        </p:attrNameLst>
+                                      </p:cBhvr>
+                                      <p:to>
+                                        <p:strVal val="visible"/>
+                                      </p:to>
+                                    </p:set>
+                                  </p:childTnLst>
+                                </p:cTn>
+                              </p:par>
+                            </p:childTnLst>
+                          </p:cTn>
+                        </p:par>
+                      </p:childTnLst>
+                    </p:cTn>
+                  </p:par>
+                  <p:par>
+                    <p:cTn id="11" fill="hold">
+                      <p:stCondLst>
+                        <p:cond delay="indefinite"/>
+                      </p:stCondLst>
+                      <p:childTnLst>
+                        <p:par>
+                          <p:cTn id="12" fill="hold">
+                            <p:stCondLst>
+                              <p:cond delay="0"/>
+                            </p:stCondLst>
+                            <p:childTnLst>
+                              <p:par>
+                                <p:cTn id="13" presetID="1" presetClass="entr" presetSubtype="0" fill="hold" nodeType="clickEffect">
+                                  <p:stCondLst>
+                                    <p:cond delay="0"/>
+                                  </p:stCondLst>
+                                  <p:childTnLst>
+                                    <p:set>
+                                      <p:cBhvr>
+                                        <p:cTn id="14" dur="1" fill="hold">
+                                          <p:stCondLst>
+                                            <p:cond delay="0"/>
+                                          </p:stCondLst>
+                                        </p:cTn>
+                                        <p:tgtEl>
+                                          <p:spTgt spid="10"/>
+                                        </p:tgtEl>
+                                        <p:attrNameLst>
+                                          <p:attrName>style.visibility</p:attrName>
+                                        </p:attrNameLst>
+                                      </p:cBhvr>
+                                      <p:to>
+                                        <p:strVal val="visible"/>
+                                      </p:to>
+                                    </p:set>
+                                  </p:childTnLst>
+                                </p:cTn>
+                              </p:par>
+                              <p:par>
+                                <p:cTn id="15" presetID="1" presetClass="entr" presetSubtype="0" fill="hold" nodeType="withEffect">
+                                  <p:stCondLst>
+                                    <p:cond delay="0"/>
+                                  </p:stCondLst>
+                                  <p:childTnLst>
+                                    <p:set>
+                                      <p:cBhvr>
+                                        <p:cTn id="16" dur="1" fill="hold">
+                                          <p:stCondLst>
+                                            <p:cond delay="0"/>
+                                          </p:stCondLst>
+                                        </p:cTn>
+                                        <p:tgtEl>
+                                          <p:spTgt spid="9"/>
+                                        </p:tgtEl>
+                                        <p:attrNameLst>
+                                          <p:attrName>style.visibility</p:attrName>
+                                        </p:attrNameLst>
+                                      </p:cBhvr>
+                                      <p:to>
+                                        <p:strVal val="visible"/>
+                                      </p:to>
+                                    </p:set>
+                                  </p:childTnLst>
+                                </p:cTn>
+                              </p:par>
+                              <p:par>
+                                <p:cTn id="17" presetID="1" presetClass="entr" presetSubtype="0" fill="hold" nodeType="withEffect">
+                                  <p:stCondLst>
+                                    <p:cond delay="0"/>
+                                  </p:stCondLst>
+                                  <p:childTnLst>
+                                    <p:set>
+                                      <p:cBhvr>
+                                        <p:cTn id="18" dur="1" fill="hold">
+                                          <p:stCondLst>
+                                            <p:cond delay="0"/>
+                                          </p:stCondLst>
+                                        </p:cTn>
+                                        <p:tgtEl>
+                                          <p:spTgt spid="7"/>
+                                        </p:tgtEl>
+                                        <p:attrNameLst>
+                                          <p:attrName>style.visibility</p:attrName>
+                                        </p:attrNameLst>
+                                      </p:cBhvr>
+                                      <p:to>
+                                        <p:strVal val="visible"/>
+                                      </p:to>
+                                    </p:set>
+                                  </p:childTnLst>
+                                </p:cTn>
+                              </p:par>
+                            </p:childTnLst>
+                          </p:cTn>
+                        </p:par>
+                      </p:childTnLst>
+                    </p:cTn>
+                  </p:par>
                 </p:childTnLst>
               </p:cTn>
               <p:prevCondLst>
@@ -8242,7 +8651,7 @@
         <p:spPr>
           <a:xfrm>
             <a:off x="548640" y="731520"/>
-            <a:ext cx="11064240" cy="1138773"/>
+            <a:ext cx="11064240" cy="615553"/>
           </a:xfrm>
           <a:prstGeom prst="rect">
             <a:avLst/>
@@ -8298,8 +8707,23 @@
                 </a:solidFill>
                 <a:latin typeface="Avenir Next"/>
               </a:rPr>
-              <a:t>, over and over</a:t>
-            </a:r>
+              <a:t>, </a:t>
+            </a:r>
+            <a:r>
+              <a:rPr lang="en-US" sz="3400" b="1" i="0" dirty="0">
+                <a:solidFill>
+                  <a:srgbClr val="1B2025"/>
+                </a:solidFill>
+                <a:latin typeface="Avenir Next"/>
+              </a:rPr>
+              <a:t>repeatedly</a:t>
+            </a:r>
+            <a:endParaRPr sz="3400" b="1" i="0" dirty="0">
+              <a:solidFill>
+                <a:srgbClr val="1B2025"/>
+              </a:solidFill>
+              <a:latin typeface="Avenir Next"/>
+            </a:endParaRPr>
           </a:p>
         </p:txBody>
       </p:sp>
@@ -8778,6 +9202,268 @@
   <p:clrMapOvr>
     <a:masterClrMapping/>
   </p:clrMapOvr>
+  <p:timing>
+    <p:tnLst>
+      <p:par>
+        <p:cTn id="1" dur="indefinite" restart="never" nodeType="tmRoot">
+          <p:childTnLst>
+            <p:seq concurrent="1" nextAc="seek">
+              <p:cTn id="2" dur="indefinite" nodeType="mainSeq">
+                <p:childTnLst>
+                  <p:par>
+                    <p:cTn id="3" fill="hold">
+                      <p:stCondLst>
+                        <p:cond delay="indefinite"/>
+                      </p:stCondLst>
+                      <p:childTnLst>
+                        <p:par>
+                          <p:cTn id="4" fill="hold">
+                            <p:stCondLst>
+                              <p:cond delay="0"/>
+                            </p:stCondLst>
+                            <p:childTnLst>
+                              <p:par>
+                                <p:cTn id="5" presetID="1" presetClass="entr" presetSubtype="0" fill="hold" grpId="0" nodeType="clickEffect">
+                                  <p:stCondLst>
+                                    <p:cond delay="0"/>
+                                  </p:stCondLst>
+                                  <p:childTnLst>
+                                    <p:set>
+                                      <p:cBhvr>
+                                        <p:cTn id="6" dur="1" fill="hold">
+                                          <p:stCondLst>
+                                            <p:cond delay="0"/>
+                                          </p:stCondLst>
+                                        </p:cTn>
+                                        <p:tgtEl>
+                                          <p:spTgt spid="5"/>
+                                        </p:tgtEl>
+                                        <p:attrNameLst>
+                                          <p:attrName>style.visibility</p:attrName>
+                                        </p:attrNameLst>
+                                      </p:cBhvr>
+                                      <p:to>
+                                        <p:strVal val="visible"/>
+                                      </p:to>
+                                    </p:set>
+                                  </p:childTnLst>
+                                </p:cTn>
+                              </p:par>
+                            </p:childTnLst>
+                          </p:cTn>
+                        </p:par>
+                      </p:childTnLst>
+                    </p:cTn>
+                  </p:par>
+                  <p:par>
+                    <p:cTn id="7" fill="hold">
+                      <p:stCondLst>
+                        <p:cond delay="indefinite"/>
+                      </p:stCondLst>
+                      <p:childTnLst>
+                        <p:par>
+                          <p:cTn id="8" fill="hold">
+                            <p:stCondLst>
+                              <p:cond delay="0"/>
+                            </p:stCondLst>
+                            <p:childTnLst>
+                              <p:par>
+                                <p:cTn id="9" presetID="1" presetClass="entr" presetSubtype="0" fill="hold" grpId="0" nodeType="clickEffect">
+                                  <p:stCondLst>
+                                    <p:cond delay="0"/>
+                                  </p:stCondLst>
+                                  <p:childTnLst>
+                                    <p:set>
+                                      <p:cBhvr>
+                                        <p:cTn id="10" dur="1" fill="hold">
+                                          <p:stCondLst>
+                                            <p:cond delay="0"/>
+                                          </p:stCondLst>
+                                        </p:cTn>
+                                        <p:tgtEl>
+                                          <p:spTgt spid="7"/>
+                                        </p:tgtEl>
+                                        <p:attrNameLst>
+                                          <p:attrName>style.visibility</p:attrName>
+                                        </p:attrNameLst>
+                                      </p:cBhvr>
+                                      <p:to>
+                                        <p:strVal val="visible"/>
+                                      </p:to>
+                                    </p:set>
+                                  </p:childTnLst>
+                                </p:cTn>
+                              </p:par>
+                            </p:childTnLst>
+                          </p:cTn>
+                        </p:par>
+                      </p:childTnLst>
+                    </p:cTn>
+                  </p:par>
+                  <p:par>
+                    <p:cTn id="11" fill="hold">
+                      <p:stCondLst>
+                        <p:cond delay="indefinite"/>
+                      </p:stCondLst>
+                      <p:childTnLst>
+                        <p:par>
+                          <p:cTn id="12" fill="hold">
+                            <p:stCondLst>
+                              <p:cond delay="0"/>
+                            </p:stCondLst>
+                            <p:childTnLst>
+                              <p:par>
+                                <p:cTn id="13" presetID="1" presetClass="entr" presetSubtype="0" fill="hold" grpId="0" nodeType="clickEffect">
+                                  <p:stCondLst>
+                                    <p:cond delay="0"/>
+                                  </p:stCondLst>
+                                  <p:childTnLst>
+                                    <p:set>
+                                      <p:cBhvr>
+                                        <p:cTn id="14" dur="1" fill="hold">
+                                          <p:stCondLst>
+                                            <p:cond delay="0"/>
+                                          </p:stCondLst>
+                                        </p:cTn>
+                                        <p:tgtEl>
+                                          <p:spTgt spid="9"/>
+                                        </p:tgtEl>
+                                        <p:attrNameLst>
+                                          <p:attrName>style.visibility</p:attrName>
+                                        </p:attrNameLst>
+                                      </p:cBhvr>
+                                      <p:to>
+                                        <p:strVal val="visible"/>
+                                      </p:to>
+                                    </p:set>
+                                  </p:childTnLst>
+                                </p:cTn>
+                              </p:par>
+                            </p:childTnLst>
+                          </p:cTn>
+                        </p:par>
+                      </p:childTnLst>
+                    </p:cTn>
+                  </p:par>
+                  <p:par>
+                    <p:cTn id="15" fill="hold">
+                      <p:stCondLst>
+                        <p:cond delay="indefinite"/>
+                      </p:stCondLst>
+                      <p:childTnLst>
+                        <p:par>
+                          <p:cTn id="16" fill="hold">
+                            <p:stCondLst>
+                              <p:cond delay="0"/>
+                            </p:stCondLst>
+                            <p:childTnLst>
+                              <p:par>
+                                <p:cTn id="17" presetID="1" presetClass="entr" presetSubtype="0" fill="hold" grpId="0" nodeType="clickEffect">
+                                  <p:stCondLst>
+                                    <p:cond delay="0"/>
+                                  </p:stCondLst>
+                                  <p:childTnLst>
+                                    <p:set>
+                                      <p:cBhvr>
+                                        <p:cTn id="18" dur="1" fill="hold">
+                                          <p:stCondLst>
+                                            <p:cond delay="0"/>
+                                          </p:stCondLst>
+                                        </p:cTn>
+                                        <p:tgtEl>
+                                          <p:spTgt spid="11"/>
+                                        </p:tgtEl>
+                                        <p:attrNameLst>
+                                          <p:attrName>style.visibility</p:attrName>
+                                        </p:attrNameLst>
+                                      </p:cBhvr>
+                                      <p:to>
+                                        <p:strVal val="visible"/>
+                                      </p:to>
+                                    </p:set>
+                                  </p:childTnLst>
+                                </p:cTn>
+                              </p:par>
+                            </p:childTnLst>
+                          </p:cTn>
+                        </p:par>
+                      </p:childTnLst>
+                    </p:cTn>
+                  </p:par>
+                  <p:par>
+                    <p:cTn id="19" fill="hold">
+                      <p:stCondLst>
+                        <p:cond delay="indefinite"/>
+                      </p:stCondLst>
+                      <p:childTnLst>
+                        <p:par>
+                          <p:cTn id="20" fill="hold">
+                            <p:stCondLst>
+                              <p:cond delay="0"/>
+                            </p:stCondLst>
+                            <p:childTnLst>
+                              <p:par>
+                                <p:cTn id="21" presetID="1" presetClass="entr" presetSubtype="0" fill="hold" grpId="0" nodeType="clickEffect">
+                                  <p:stCondLst>
+                                    <p:cond delay="0"/>
+                                  </p:stCondLst>
+                                  <p:childTnLst>
+                                    <p:set>
+                                      <p:cBhvr>
+                                        <p:cTn id="22" dur="1" fill="hold">
+                                          <p:stCondLst>
+                                            <p:cond delay="0"/>
+                                          </p:stCondLst>
+                                        </p:cTn>
+                                        <p:tgtEl>
+                                          <p:spTgt spid="12"/>
+                                        </p:tgtEl>
+                                        <p:attrNameLst>
+                                          <p:attrName>style.visibility</p:attrName>
+                                        </p:attrNameLst>
+                                      </p:cBhvr>
+                                      <p:to>
+                                        <p:strVal val="visible"/>
+                                      </p:to>
+                                    </p:set>
+                                  </p:childTnLst>
+                                </p:cTn>
+                              </p:par>
+                            </p:childTnLst>
+                          </p:cTn>
+                        </p:par>
+                      </p:childTnLst>
+                    </p:cTn>
+                  </p:par>
+                </p:childTnLst>
+              </p:cTn>
+              <p:prevCondLst>
+                <p:cond evt="onPrev" delay="0">
+                  <p:tgtEl>
+                    <p:sldTgt/>
+                  </p:tgtEl>
+                </p:cond>
+              </p:prevCondLst>
+              <p:nextCondLst>
+                <p:cond evt="onNext" delay="0">
+                  <p:tgtEl>
+                    <p:sldTgt/>
+                  </p:tgtEl>
+                </p:cond>
+              </p:nextCondLst>
+            </p:seq>
+          </p:childTnLst>
+        </p:cTn>
+      </p:par>
+    </p:tnLst>
+    <p:bldLst>
+      <p:bldP spid="5" grpId="0" animBg="1"/>
+      <p:bldP spid="7" grpId="0" animBg="1"/>
+      <p:bldP spid="9" grpId="0" animBg="1"/>
+      <p:bldP spid="11" grpId="0" animBg="1"/>
+      <p:bldP spid="12" grpId="0" animBg="1"/>
+    </p:bldLst>
+  </p:timing>
 </p:sld>
 </file>
 
@@ -8927,12 +9613,17 @@
         </p:blipFill>
         <p:spPr>
           <a:xfrm>
-            <a:off x="2650980" y="1828800"/>
-            <a:ext cx="6859560" cy="3657600"/>
+            <a:off x="4198436" y="2493262"/>
+            <a:ext cx="5630518" cy="3002260"/>
           </a:xfrm>
           <a:prstGeom prst="rect">
             <a:avLst/>
           </a:prstGeom>
+          <a:ln>
+            <a:solidFill>
+              <a:schemeClr val="accent1"/>
+            </a:solidFill>
+          </a:ln>
         </p:spPr>
       </p:pic>
       <p:sp>
@@ -9008,6 +9699,75 @@
           </a:p>
         </p:txBody>
       </p:sp>
+      <p:pic>
+        <p:nvPicPr>
+          <p:cNvPr id="7" name="Picture 6">
+            <a:extLst>
+              <a:ext uri="{FF2B5EF4-FFF2-40B4-BE49-F238E27FC236}">
+                <a16:creationId xmlns:a16="http://schemas.microsoft.com/office/drawing/2014/main" id="{9D1972BD-C7DC-1AB4-931A-B6B48A93FD4D}"/>
+              </a:ext>
+            </a:extLst>
+          </p:cNvPr>
+          <p:cNvPicPr>
+            <a:picLocks noChangeAspect="1"/>
+          </p:cNvPicPr>
+          <p:nvPr/>
+        </p:nvPicPr>
+        <p:blipFill>
+          <a:blip r:embed="rId4"/>
+          <a:stretch>
+            <a:fillRect/>
+          </a:stretch>
+        </p:blipFill>
+        <p:spPr>
+          <a:xfrm>
+            <a:off x="548640" y="1155215"/>
+            <a:ext cx="7772400" cy="1255730"/>
+          </a:xfrm>
+          <a:prstGeom prst="rect">
+            <a:avLst/>
+          </a:prstGeom>
+        </p:spPr>
+      </p:pic>
+      <p:cxnSp>
+        <p:nvCxnSpPr>
+          <p:cNvPr id="9" name="Straight Arrow Connector 8">
+            <a:extLst>
+              <a:ext uri="{FF2B5EF4-FFF2-40B4-BE49-F238E27FC236}">
+                <a16:creationId xmlns:a16="http://schemas.microsoft.com/office/drawing/2014/main" id="{06CDDA06-6208-FC28-EA2A-FA118B92F0BB}"/>
+              </a:ext>
+            </a:extLst>
+          </p:cNvPr>
+          <p:cNvCxnSpPr/>
+          <p:nvPr/>
+        </p:nvCxnSpPr>
+        <p:spPr>
+          <a:xfrm>
+            <a:off x="3484605" y="2100649"/>
+            <a:ext cx="593125" cy="1328351"/>
+          </a:xfrm>
+          <a:prstGeom prst="straightConnector1">
+            <a:avLst/>
+          </a:prstGeom>
+          <a:ln>
+            <a:tailEnd type="triangle"/>
+          </a:ln>
+        </p:spPr>
+        <p:style>
+          <a:lnRef idx="2">
+            <a:schemeClr val="accent1"/>
+          </a:lnRef>
+          <a:fillRef idx="0">
+            <a:schemeClr val="accent1"/>
+          </a:fillRef>
+          <a:effectRef idx="1">
+            <a:schemeClr val="accent1"/>
+          </a:effectRef>
+          <a:fontRef idx="minor">
+            <a:schemeClr val="tx1"/>
+          </a:fontRef>
+        </p:style>
+      </p:cxnSp>
     </p:spTree>
   </p:cSld>
   <p:clrMapOvr>
@@ -9103,1059 +9863,6 @@
       </p:sp>
       <p:sp>
         <p:nvSpPr>
-          <p:cNvPr id="15" name="object 6">
-            <a:extLst>
-              <a:ext uri="{FF2B5EF4-FFF2-40B4-BE49-F238E27FC236}">
-                <a16:creationId xmlns:a16="http://schemas.microsoft.com/office/drawing/2014/main" id="{0D5CB11C-EC98-27DD-EEE8-8759E67221D4}"/>
-              </a:ext>
-            </a:extLst>
-          </p:cNvPr>
-          <p:cNvSpPr/>
-          <p:nvPr/>
-        </p:nvSpPr>
-        <p:spPr>
-          <a:xfrm>
-            <a:off x="1644293" y="5671057"/>
-            <a:ext cx="8281670" cy="114300"/>
-          </a:xfrm>
-          <a:custGeom>
-            <a:avLst/>
-            <a:gdLst/>
-            <a:ahLst/>
-            <a:cxnLst/>
-            <a:rect l="l" t="t" r="r" b="b"/>
-            <a:pathLst>
-              <a:path w="8281670" h="114300">
-                <a:moveTo>
-                  <a:pt x="8166861" y="0"/>
-                </a:moveTo>
-                <a:lnTo>
-                  <a:pt x="8166861" y="114299"/>
-                </a:lnTo>
-                <a:lnTo>
-                  <a:pt x="8243061" y="76199"/>
-                </a:lnTo>
-                <a:lnTo>
-                  <a:pt x="8185911" y="76199"/>
-                </a:lnTo>
-                <a:lnTo>
-                  <a:pt x="8185911" y="38099"/>
-                </a:lnTo>
-                <a:lnTo>
-                  <a:pt x="8243061" y="38099"/>
-                </a:lnTo>
-                <a:lnTo>
-                  <a:pt x="8166861" y="0"/>
-                </a:lnTo>
-                <a:close/>
-              </a:path>
-              <a:path w="8281670" h="114300">
-                <a:moveTo>
-                  <a:pt x="8166861" y="38099"/>
-                </a:moveTo>
-                <a:lnTo>
-                  <a:pt x="0" y="38099"/>
-                </a:lnTo>
-                <a:lnTo>
-                  <a:pt x="0" y="76199"/>
-                </a:lnTo>
-                <a:lnTo>
-                  <a:pt x="8166861" y="76199"/>
-                </a:lnTo>
-                <a:lnTo>
-                  <a:pt x="8166861" y="38099"/>
-                </a:lnTo>
-                <a:close/>
-              </a:path>
-              <a:path w="8281670" h="114300">
-                <a:moveTo>
-                  <a:pt x="8243061" y="38099"/>
-                </a:moveTo>
-                <a:lnTo>
-                  <a:pt x="8185911" y="38099"/>
-                </a:lnTo>
-                <a:lnTo>
-                  <a:pt x="8185911" y="76199"/>
-                </a:lnTo>
-                <a:lnTo>
-                  <a:pt x="8243061" y="76199"/>
-                </a:lnTo>
-                <a:lnTo>
-                  <a:pt x="8281161" y="57149"/>
-                </a:lnTo>
-                <a:lnTo>
-                  <a:pt x="8243061" y="38099"/>
-                </a:lnTo>
-                <a:close/>
-              </a:path>
-            </a:pathLst>
-          </a:custGeom>
-          <a:solidFill>
-            <a:srgbClr val="000000"/>
-          </a:solidFill>
-        </p:spPr>
-        <p:txBody>
-          <a:bodyPr wrap="square" lIns="0" tIns="0" rIns="0" bIns="0" rtlCol="0"/>
-          <a:lstStyle/>
-          <a:p>
-            <a:endParaRPr/>
-          </a:p>
-        </p:txBody>
-      </p:sp>
-      <p:sp>
-        <p:nvSpPr>
-          <p:cNvPr id="16" name="object 7">
-            <a:extLst>
-              <a:ext uri="{FF2B5EF4-FFF2-40B4-BE49-F238E27FC236}">
-                <a16:creationId xmlns:a16="http://schemas.microsoft.com/office/drawing/2014/main" id="{22E5B4D3-AC75-53B1-1F02-64E308FC7669}"/>
-              </a:ext>
-            </a:extLst>
-          </p:cNvPr>
-          <p:cNvSpPr txBox="1"/>
-          <p:nvPr/>
-        </p:nvSpPr>
-        <p:spPr>
-          <a:xfrm>
-            <a:off x="9448447" y="5638546"/>
-            <a:ext cx="242570" cy="415925"/>
-          </a:xfrm>
-          <a:prstGeom prst="rect">
-            <a:avLst/>
-          </a:prstGeom>
-        </p:spPr>
-        <p:txBody>
-          <a:bodyPr vert="horz" wrap="square" lIns="0" tIns="13970" rIns="0" bIns="0" rtlCol="0">
-            <a:spAutoFit/>
-          </a:bodyPr>
-          <a:lstStyle/>
-          <a:p>
-            <a:pPr marL="12700">
-              <a:spcBef>
-                <a:spcPts val="110"/>
-              </a:spcBef>
-            </a:pPr>
-            <a:r>
-              <a:rPr sz="2550" i="1" dirty="0">
-                <a:latin typeface="Times New Roman"/>
-                <a:cs typeface="Times New Roman"/>
-              </a:rPr>
-              <a:t>w</a:t>
-            </a:r>
-            <a:endParaRPr sz="2550">
-              <a:latin typeface="Times New Roman"/>
-              <a:cs typeface="Times New Roman"/>
-            </a:endParaRPr>
-          </a:p>
-        </p:txBody>
-      </p:sp>
-      <p:sp>
-        <p:nvSpPr>
-          <p:cNvPr id="17" name="object 9">
-            <a:extLst>
-              <a:ext uri="{FF2B5EF4-FFF2-40B4-BE49-F238E27FC236}">
-                <a16:creationId xmlns:a16="http://schemas.microsoft.com/office/drawing/2014/main" id="{7668A112-56D0-80A9-6C6E-FEB6623F4F3A}"/>
-              </a:ext>
-            </a:extLst>
-          </p:cNvPr>
-          <p:cNvSpPr/>
-          <p:nvPr/>
-        </p:nvSpPr>
-        <p:spPr>
-          <a:xfrm>
-            <a:off x="2111399" y="2083562"/>
-            <a:ext cx="6681470" cy="4209415"/>
-          </a:xfrm>
-          <a:custGeom>
-            <a:avLst/>
-            <a:gdLst/>
-            <a:ahLst/>
-            <a:cxnLst/>
-            <a:rect l="l" t="t" r="r" b="b"/>
-            <a:pathLst>
-              <a:path w="6681470" h="4209415">
-                <a:moveTo>
-                  <a:pt x="0" y="0"/>
-                </a:moveTo>
-                <a:lnTo>
-                  <a:pt x="11304" y="55642"/>
-                </a:lnTo>
-                <a:lnTo>
-                  <a:pt x="23084" y="110995"/>
-                </a:lnTo>
-                <a:lnTo>
-                  <a:pt x="35337" y="166048"/>
-                </a:lnTo>
-                <a:lnTo>
-                  <a:pt x="48062" y="220789"/>
-                </a:lnTo>
-                <a:lnTo>
-                  <a:pt x="61255" y="275206"/>
-                </a:lnTo>
-                <a:lnTo>
-                  <a:pt x="74914" y="329288"/>
-                </a:lnTo>
-                <a:lnTo>
-                  <a:pt x="89037" y="383022"/>
-                </a:lnTo>
-                <a:lnTo>
-                  <a:pt x="103621" y="436397"/>
-                </a:lnTo>
-                <a:lnTo>
-                  <a:pt x="118664" y="489402"/>
-                </a:lnTo>
-                <a:lnTo>
-                  <a:pt x="134163" y="542025"/>
-                </a:lnTo>
-                <a:lnTo>
-                  <a:pt x="150117" y="594253"/>
-                </a:lnTo>
-                <a:lnTo>
-                  <a:pt x="166521" y="646076"/>
-                </a:lnTo>
-                <a:lnTo>
-                  <a:pt x="183375" y="697482"/>
-                </a:lnTo>
-                <a:lnTo>
-                  <a:pt x="200676" y="748459"/>
-                </a:lnTo>
-                <a:lnTo>
-                  <a:pt x="218421" y="798995"/>
-                </a:lnTo>
-                <a:lnTo>
-                  <a:pt x="236608" y="849079"/>
-                </a:lnTo>
-                <a:lnTo>
-                  <a:pt x="255234" y="898699"/>
-                </a:lnTo>
-                <a:lnTo>
-                  <a:pt x="274297" y="947843"/>
-                </a:lnTo>
-                <a:lnTo>
-                  <a:pt x="293794" y="996499"/>
-                </a:lnTo>
-                <a:lnTo>
-                  <a:pt x="313724" y="1044657"/>
-                </a:lnTo>
-                <a:lnTo>
-                  <a:pt x="334083" y="1092304"/>
-                </a:lnTo>
-                <a:lnTo>
-                  <a:pt x="354870" y="1139429"/>
-                </a:lnTo>
-                <a:lnTo>
-                  <a:pt x="376081" y="1186019"/>
-                </a:lnTo>
-                <a:lnTo>
-                  <a:pt x="397715" y="1232064"/>
-                </a:lnTo>
-                <a:lnTo>
-                  <a:pt x="419768" y="1277552"/>
-                </a:lnTo>
-                <a:lnTo>
-                  <a:pt x="442239" y="1322470"/>
-                </a:lnTo>
-                <a:lnTo>
-                  <a:pt x="465125" y="1366807"/>
-                </a:lnTo>
-                <a:lnTo>
-                  <a:pt x="488424" y="1410552"/>
-                </a:lnTo>
-                <a:lnTo>
-                  <a:pt x="512133" y="1453693"/>
-                </a:lnTo>
-                <a:lnTo>
-                  <a:pt x="536250" y="1496218"/>
-                </a:lnTo>
-                <a:lnTo>
-                  <a:pt x="560772" y="1538116"/>
-                </a:lnTo>
-                <a:lnTo>
-                  <a:pt x="585697" y="1579375"/>
-                </a:lnTo>
-                <a:lnTo>
-                  <a:pt x="611022" y="1619982"/>
-                </a:lnTo>
-                <a:lnTo>
-                  <a:pt x="636746" y="1659927"/>
-                </a:lnTo>
-                <a:lnTo>
-                  <a:pt x="662865" y="1699198"/>
-                </a:lnTo>
-                <a:lnTo>
-                  <a:pt x="689377" y="1737783"/>
-                </a:lnTo>
-                <a:lnTo>
-                  <a:pt x="716280" y="1775670"/>
-                </a:lnTo>
-                <a:lnTo>
-                  <a:pt x="743571" y="1812848"/>
-                </a:lnTo>
-                <a:lnTo>
-                  <a:pt x="771248" y="1849306"/>
-                </a:lnTo>
-                <a:lnTo>
-                  <a:pt x="799308" y="1885030"/>
-                </a:lnTo>
-                <a:lnTo>
-                  <a:pt x="827750" y="1920011"/>
-                </a:lnTo>
-                <a:lnTo>
-                  <a:pt x="856570" y="1954235"/>
-                </a:lnTo>
-                <a:lnTo>
-                  <a:pt x="885766" y="1987692"/>
-                </a:lnTo>
-                <a:lnTo>
-                  <a:pt x="915336" y="2020369"/>
-                </a:lnTo>
-                <a:lnTo>
-                  <a:pt x="945277" y="2052256"/>
-                </a:lnTo>
-                <a:lnTo>
-                  <a:pt x="975588" y="2083339"/>
-                </a:lnTo>
-                <a:lnTo>
-                  <a:pt x="1006264" y="2113609"/>
-                </a:lnTo>
-                <a:lnTo>
-                  <a:pt x="1037305" y="2143052"/>
-                </a:lnTo>
-                <a:lnTo>
-                  <a:pt x="1068707" y="2171658"/>
-                </a:lnTo>
-                <a:lnTo>
-                  <a:pt x="1100468" y="2199414"/>
-                </a:lnTo>
-                <a:lnTo>
-                  <a:pt x="1132586" y="2226310"/>
-                </a:lnTo>
-                <a:lnTo>
-                  <a:pt x="1168975" y="2255042"/>
-                </a:lnTo>
-                <a:lnTo>
-                  <a:pt x="1206504" y="2282598"/>
-                </a:lnTo>
-                <a:lnTo>
-                  <a:pt x="1245125" y="2309002"/>
-                </a:lnTo>
-                <a:lnTo>
-                  <a:pt x="1284793" y="2334278"/>
-                </a:lnTo>
-                <a:lnTo>
-                  <a:pt x="1325462" y="2358451"/>
-                </a:lnTo>
-                <a:lnTo>
-                  <a:pt x="1367088" y="2381544"/>
-                </a:lnTo>
-                <a:lnTo>
-                  <a:pt x="1409625" y="2403583"/>
-                </a:lnTo>
-                <a:lnTo>
-                  <a:pt x="1453027" y="2424590"/>
-                </a:lnTo>
-                <a:lnTo>
-                  <a:pt x="1497248" y="2444592"/>
-                </a:lnTo>
-                <a:lnTo>
-                  <a:pt x="1542244" y="2463611"/>
-                </a:lnTo>
-                <a:lnTo>
-                  <a:pt x="1587968" y="2481672"/>
-                </a:lnTo>
-                <a:lnTo>
-                  <a:pt x="1634376" y="2498799"/>
-                </a:lnTo>
-                <a:lnTo>
-                  <a:pt x="1681421" y="2515017"/>
-                </a:lnTo>
-                <a:lnTo>
-                  <a:pt x="1729059" y="2530350"/>
-                </a:lnTo>
-                <a:lnTo>
-                  <a:pt x="1777243" y="2544822"/>
-                </a:lnTo>
-                <a:lnTo>
-                  <a:pt x="1825929" y="2558457"/>
-                </a:lnTo>
-                <a:lnTo>
-                  <a:pt x="1875070" y="2571280"/>
-                </a:lnTo>
-                <a:lnTo>
-                  <a:pt x="1924621" y="2583315"/>
-                </a:lnTo>
-                <a:lnTo>
-                  <a:pt x="1974537" y="2594587"/>
-                </a:lnTo>
-                <a:lnTo>
-                  <a:pt x="2024772" y="2605118"/>
-                </a:lnTo>
-                <a:lnTo>
-                  <a:pt x="2075281" y="2614935"/>
-                </a:lnTo>
-                <a:lnTo>
-                  <a:pt x="2126018" y="2624060"/>
-                </a:lnTo>
-                <a:lnTo>
-                  <a:pt x="2176938" y="2632519"/>
-                </a:lnTo>
-                <a:lnTo>
-                  <a:pt x="2227995" y="2640335"/>
-                </a:lnTo>
-                <a:lnTo>
-                  <a:pt x="2279144" y="2647534"/>
-                </a:lnTo>
-                <a:lnTo>
-                  <a:pt x="2330339" y="2654138"/>
-                </a:lnTo>
-                <a:lnTo>
-                  <a:pt x="2381535" y="2660172"/>
-                </a:lnTo>
-                <a:lnTo>
-                  <a:pt x="2432685" y="2665662"/>
-                </a:lnTo>
-                <a:lnTo>
-                  <a:pt x="2483746" y="2670630"/>
-                </a:lnTo>
-                <a:lnTo>
-                  <a:pt x="2534671" y="2675101"/>
-                </a:lnTo>
-                <a:lnTo>
-                  <a:pt x="2585414" y="2679100"/>
-                </a:lnTo>
-                <a:lnTo>
-                  <a:pt x="2635931" y="2682650"/>
-                </a:lnTo>
-                <a:lnTo>
-                  <a:pt x="2686175" y="2685777"/>
-                </a:lnTo>
-                <a:lnTo>
-                  <a:pt x="2736102" y="2688504"/>
-                </a:lnTo>
-                <a:lnTo>
-                  <a:pt x="2785665" y="2690855"/>
-                </a:lnTo>
-                <a:lnTo>
-                  <a:pt x="2834820" y="2692855"/>
-                </a:lnTo>
-                <a:lnTo>
-                  <a:pt x="2883520" y="2694528"/>
-                </a:lnTo>
-                <a:lnTo>
-                  <a:pt x="2931720" y="2695898"/>
-                </a:lnTo>
-                <a:lnTo>
-                  <a:pt x="2979376" y="2696990"/>
-                </a:lnTo>
-                <a:lnTo>
-                  <a:pt x="3026440" y="2697828"/>
-                </a:lnTo>
-                <a:lnTo>
-                  <a:pt x="3072868" y="2698436"/>
-                </a:lnTo>
-                <a:lnTo>
-                  <a:pt x="3118614" y="2698838"/>
-                </a:lnTo>
-                <a:lnTo>
-                  <a:pt x="3163633" y="2699059"/>
-                </a:lnTo>
-                <a:lnTo>
-                  <a:pt x="3207879" y="2699123"/>
-                </a:lnTo>
-                <a:lnTo>
-                  <a:pt x="3251307" y="2699054"/>
-                </a:lnTo>
-                <a:lnTo>
-                  <a:pt x="3293872" y="2698877"/>
-                </a:lnTo>
-                <a:lnTo>
-                  <a:pt x="3342309" y="2700105"/>
-                </a:lnTo>
-                <a:lnTo>
-                  <a:pt x="3390715" y="2704222"/>
-                </a:lnTo>
-                <a:lnTo>
-                  <a:pt x="3439063" y="2711078"/>
-                </a:lnTo>
-                <a:lnTo>
-                  <a:pt x="3487324" y="2720522"/>
-                </a:lnTo>
-                <a:lnTo>
-                  <a:pt x="3535473" y="2732403"/>
-                </a:lnTo>
-                <a:lnTo>
-                  <a:pt x="3583482" y="2746570"/>
-                </a:lnTo>
-                <a:lnTo>
-                  <a:pt x="3631324" y="2762872"/>
-                </a:lnTo>
-                <a:lnTo>
-                  <a:pt x="3678971" y="2781159"/>
-                </a:lnTo>
-                <a:lnTo>
-                  <a:pt x="3726397" y="2801280"/>
-                </a:lnTo>
-                <a:lnTo>
-                  <a:pt x="3773574" y="2823083"/>
-                </a:lnTo>
-                <a:lnTo>
-                  <a:pt x="3820476" y="2846420"/>
-                </a:lnTo>
-                <a:lnTo>
-                  <a:pt x="3867075" y="2871137"/>
-                </a:lnTo>
-                <a:lnTo>
-                  <a:pt x="3913343" y="2897085"/>
-                </a:lnTo>
-                <a:lnTo>
-                  <a:pt x="3959255" y="2924113"/>
-                </a:lnTo>
-                <a:lnTo>
-                  <a:pt x="4004782" y="2952070"/>
-                </a:lnTo>
-                <a:lnTo>
-                  <a:pt x="4049897" y="2980806"/>
-                </a:lnTo>
-                <a:lnTo>
-                  <a:pt x="4094574" y="3010169"/>
-                </a:lnTo>
-                <a:lnTo>
-                  <a:pt x="4138786" y="3040009"/>
-                </a:lnTo>
-                <a:lnTo>
-                  <a:pt x="4182504" y="3070175"/>
-                </a:lnTo>
-                <a:lnTo>
-                  <a:pt x="4225702" y="3100516"/>
-                </a:lnTo>
-                <a:lnTo>
-                  <a:pt x="4268353" y="3130881"/>
-                </a:lnTo>
-                <a:lnTo>
-                  <a:pt x="4310430" y="3161120"/>
-                </a:lnTo>
-                <a:lnTo>
-                  <a:pt x="4351905" y="3191082"/>
-                </a:lnTo>
-                <a:lnTo>
-                  <a:pt x="4392752" y="3220616"/>
-                </a:lnTo>
-                <a:lnTo>
-                  <a:pt x="4432942" y="3249571"/>
-                </a:lnTo>
-                <a:lnTo>
-                  <a:pt x="4472450" y="3277797"/>
-                </a:lnTo>
-                <a:lnTo>
-                  <a:pt x="4511248" y="3305142"/>
-                </a:lnTo>
-                <a:lnTo>
-                  <a:pt x="4549308" y="3331456"/>
-                </a:lnTo>
-                <a:lnTo>
-                  <a:pt x="4586605" y="3356589"/>
-                </a:lnTo>
-                <a:lnTo>
-                  <a:pt x="4623109" y="3380388"/>
-                </a:lnTo>
-                <a:lnTo>
-                  <a:pt x="4658795" y="3402705"/>
-                </a:lnTo>
-                <a:lnTo>
-                  <a:pt x="4693635" y="3423387"/>
-                </a:lnTo>
-                <a:lnTo>
-                  <a:pt x="4727602" y="3442284"/>
-                </a:lnTo>
-                <a:lnTo>
-                  <a:pt x="4792809" y="3474120"/>
-                </a:lnTo>
-                <a:lnTo>
-                  <a:pt x="4854198" y="3497007"/>
-                </a:lnTo>
-                <a:lnTo>
-                  <a:pt x="4911552" y="3509738"/>
-                </a:lnTo>
-                <a:lnTo>
-                  <a:pt x="4938649" y="3511918"/>
-                </a:lnTo>
-                <a:lnTo>
-                  <a:pt x="4982820" y="3509893"/>
-                </a:lnTo>
-                <a:lnTo>
-                  <a:pt x="5023134" y="3501676"/>
-                </a:lnTo>
-                <a:lnTo>
-                  <a:pt x="5059838" y="3487750"/>
-                </a:lnTo>
-                <a:lnTo>
-                  <a:pt x="5093181" y="3468600"/>
-                </a:lnTo>
-                <a:lnTo>
-                  <a:pt x="5123411" y="3444710"/>
-                </a:lnTo>
-                <a:lnTo>
-                  <a:pt x="5150777" y="3416562"/>
-                </a:lnTo>
-                <a:lnTo>
-                  <a:pt x="5175527" y="3384642"/>
-                </a:lnTo>
-                <a:lnTo>
-                  <a:pt x="5197910" y="3349433"/>
-                </a:lnTo>
-                <a:lnTo>
-                  <a:pt x="5218174" y="3311419"/>
-                </a:lnTo>
-                <a:lnTo>
-                  <a:pt x="5236568" y="3271083"/>
-                </a:lnTo>
-                <a:lnTo>
-                  <a:pt x="5253341" y="3228910"/>
-                </a:lnTo>
-                <a:lnTo>
-                  <a:pt x="5268740" y="3185384"/>
-                </a:lnTo>
-                <a:lnTo>
-                  <a:pt x="5283015" y="3140988"/>
-                </a:lnTo>
-                <a:lnTo>
-                  <a:pt x="5296414" y="3096206"/>
-                </a:lnTo>
-                <a:lnTo>
-                  <a:pt x="5309185" y="3051522"/>
-                </a:lnTo>
-                <a:lnTo>
-                  <a:pt x="5321577" y="3007420"/>
-                </a:lnTo>
-                <a:lnTo>
-                  <a:pt x="5333838" y="2964384"/>
-                </a:lnTo>
-                <a:lnTo>
-                  <a:pt x="5346218" y="2922897"/>
-                </a:lnTo>
-                <a:lnTo>
-                  <a:pt x="5358964" y="2883444"/>
-                </a:lnTo>
-                <a:lnTo>
-                  <a:pt x="5372324" y="2846509"/>
-                </a:lnTo>
-                <a:lnTo>
-                  <a:pt x="5401885" y="2782126"/>
-                </a:lnTo>
-                <a:lnTo>
-                  <a:pt x="5440947" y="2720822"/>
-                </a:lnTo>
-                <a:lnTo>
-                  <a:pt x="5461045" y="2682881"/>
-                </a:lnTo>
-                <a:lnTo>
-                  <a:pt x="5479246" y="2642783"/>
-                </a:lnTo>
-                <a:lnTo>
-                  <a:pt x="5495920" y="2601486"/>
-                </a:lnTo>
-                <a:lnTo>
-                  <a:pt x="5511436" y="2559950"/>
-                </a:lnTo>
-                <a:lnTo>
-                  <a:pt x="5526164" y="2519135"/>
-                </a:lnTo>
-                <a:lnTo>
-                  <a:pt x="5540475" y="2479998"/>
-                </a:lnTo>
-                <a:lnTo>
-                  <a:pt x="5554736" y="2443500"/>
-                </a:lnTo>
-                <a:lnTo>
-                  <a:pt x="5584593" y="2382258"/>
-                </a:lnTo>
-                <a:lnTo>
-                  <a:pt x="5618694" y="2343082"/>
-                </a:lnTo>
-                <a:lnTo>
-                  <a:pt x="5659996" y="2333647"/>
-                </a:lnTo>
-                <a:lnTo>
-                  <a:pt x="5684273" y="2342480"/>
-                </a:lnTo>
-                <a:lnTo>
-                  <a:pt x="5741924" y="2392045"/>
-                </a:lnTo>
-                <a:lnTo>
-                  <a:pt x="5775589" y="2435851"/>
-                </a:lnTo>
-                <a:lnTo>
-                  <a:pt x="5813579" y="2495285"/>
-                </a:lnTo>
-                <a:lnTo>
-                  <a:pt x="5834010" y="2530266"/>
-                </a:lnTo>
-                <a:lnTo>
-                  <a:pt x="5855301" y="2568440"/>
-                </a:lnTo>
-                <a:lnTo>
-                  <a:pt x="5877377" y="2609567"/>
-                </a:lnTo>
-                <a:lnTo>
-                  <a:pt x="5900164" y="2653409"/>
-                </a:lnTo>
-                <a:lnTo>
-                  <a:pt x="5923590" y="2699728"/>
-                </a:lnTo>
-                <a:lnTo>
-                  <a:pt x="5947579" y="2748286"/>
-                </a:lnTo>
-                <a:lnTo>
-                  <a:pt x="5972059" y="2798844"/>
-                </a:lnTo>
-                <a:lnTo>
-                  <a:pt x="5996954" y="2851165"/>
-                </a:lnTo>
-                <a:lnTo>
-                  <a:pt x="6022192" y="2905009"/>
-                </a:lnTo>
-                <a:lnTo>
-                  <a:pt x="6047699" y="2960138"/>
-                </a:lnTo>
-                <a:lnTo>
-                  <a:pt x="6073400" y="3016314"/>
-                </a:lnTo>
-                <a:lnTo>
-                  <a:pt x="6099222" y="3073299"/>
-                </a:lnTo>
-                <a:lnTo>
-                  <a:pt x="6125091" y="3130854"/>
-                </a:lnTo>
-                <a:lnTo>
-                  <a:pt x="6150934" y="3188741"/>
-                </a:lnTo>
-                <a:lnTo>
-                  <a:pt x="6176675" y="3246722"/>
-                </a:lnTo>
-                <a:lnTo>
-                  <a:pt x="6202243" y="3304558"/>
-                </a:lnTo>
-                <a:lnTo>
-                  <a:pt x="6227561" y="3362011"/>
-                </a:lnTo>
-                <a:lnTo>
-                  <a:pt x="6252558" y="3418843"/>
-                </a:lnTo>
-                <a:lnTo>
-                  <a:pt x="6277158" y="3474815"/>
-                </a:lnTo>
-                <a:lnTo>
-                  <a:pt x="6301289" y="3529689"/>
-                </a:lnTo>
-                <a:lnTo>
-                  <a:pt x="6324876" y="3583227"/>
-                </a:lnTo>
-                <a:lnTo>
-                  <a:pt x="6347845" y="3635190"/>
-                </a:lnTo>
-                <a:lnTo>
-                  <a:pt x="6370123" y="3685340"/>
-                </a:lnTo>
-                <a:lnTo>
-                  <a:pt x="6391635" y="3733439"/>
-                </a:lnTo>
-                <a:lnTo>
-                  <a:pt x="6412309" y="3779249"/>
-                </a:lnTo>
-                <a:lnTo>
-                  <a:pt x="6432069" y="3822530"/>
-                </a:lnTo>
-                <a:lnTo>
-                  <a:pt x="6450842" y="3863045"/>
-                </a:lnTo>
-                <a:lnTo>
-                  <a:pt x="6468555" y="3900556"/>
-                </a:lnTo>
-                <a:lnTo>
-                  <a:pt x="6500504" y="3965610"/>
-                </a:lnTo>
-                <a:lnTo>
-                  <a:pt x="6561347" y="4077532"/>
-                </a:lnTo>
-                <a:lnTo>
-                  <a:pt x="6598135" y="4138646"/>
-                </a:lnTo>
-                <a:lnTo>
-                  <a:pt x="6626201" y="4178986"/>
-                </a:lnTo>
-                <a:lnTo>
-                  <a:pt x="6661152" y="4209217"/>
-                </a:lnTo>
-                <a:lnTo>
-                  <a:pt x="6670529" y="4205044"/>
-                </a:lnTo>
-                <a:lnTo>
-                  <a:pt x="6676168" y="4191968"/>
-                </a:lnTo>
-                <a:lnTo>
-                  <a:pt x="6679315" y="4172958"/>
-                </a:lnTo>
-                <a:lnTo>
-                  <a:pt x="6681216" y="4150982"/>
-                </a:lnTo>
-              </a:path>
-            </a:pathLst>
-          </a:custGeom>
-          <a:ln w="64008">
-            <a:solidFill>
-              <a:srgbClr val="7E5F00"/>
-            </a:solidFill>
-          </a:ln>
-        </p:spPr>
-        <p:txBody>
-          <a:bodyPr wrap="square" lIns="0" tIns="0" rIns="0" bIns="0" rtlCol="0"/>
-          <a:lstStyle/>
-          <a:p>
-            <a:endParaRPr/>
-          </a:p>
-        </p:txBody>
-      </p:sp>
-      <p:sp>
-        <p:nvSpPr>
-          <p:cNvPr id="18" name="object 10">
-            <a:extLst>
-              <a:ext uri="{FF2B5EF4-FFF2-40B4-BE49-F238E27FC236}">
-                <a16:creationId xmlns:a16="http://schemas.microsoft.com/office/drawing/2014/main" id="{811C844C-87EA-24E5-84E9-60E4EFEF2889}"/>
-              </a:ext>
-            </a:extLst>
-          </p:cNvPr>
-          <p:cNvSpPr/>
-          <p:nvPr/>
-        </p:nvSpPr>
-        <p:spPr>
-          <a:xfrm>
-            <a:off x="8777374" y="4421009"/>
-            <a:ext cx="1483360" cy="1875155"/>
-          </a:xfrm>
-          <a:custGeom>
-            <a:avLst/>
-            <a:gdLst/>
-            <a:ahLst/>
-            <a:cxnLst/>
-            <a:rect l="l" t="t" r="r" b="b"/>
-            <a:pathLst>
-              <a:path w="1483359" h="1875154">
-                <a:moveTo>
-                  <a:pt x="1482852" y="1014506"/>
-                </a:moveTo>
-                <a:lnTo>
-                  <a:pt x="1463041" y="977358"/>
-                </a:lnTo>
-                <a:lnTo>
-                  <a:pt x="1444647" y="937039"/>
-                </a:lnTo>
-                <a:lnTo>
-                  <a:pt x="1427874" y="894883"/>
-                </a:lnTo>
-                <a:lnTo>
-                  <a:pt x="1412475" y="851374"/>
-                </a:lnTo>
-                <a:lnTo>
-                  <a:pt x="1398200" y="806994"/>
-                </a:lnTo>
-                <a:lnTo>
-                  <a:pt x="1384801" y="762229"/>
-                </a:lnTo>
-                <a:lnTo>
-                  <a:pt x="1372030" y="717560"/>
-                </a:lnTo>
-                <a:lnTo>
-                  <a:pt x="1359638" y="673473"/>
-                </a:lnTo>
-                <a:lnTo>
-                  <a:pt x="1347377" y="630451"/>
-                </a:lnTo>
-                <a:lnTo>
-                  <a:pt x="1334997" y="588976"/>
-                </a:lnTo>
-                <a:lnTo>
-                  <a:pt x="1322251" y="549534"/>
-                </a:lnTo>
-                <a:lnTo>
-                  <a:pt x="1308891" y="512607"/>
-                </a:lnTo>
-                <a:lnTo>
-                  <a:pt x="1279330" y="448234"/>
-                </a:lnTo>
-                <a:lnTo>
-                  <a:pt x="1240268" y="386954"/>
-                </a:lnTo>
-                <a:lnTo>
-                  <a:pt x="1220170" y="349036"/>
-                </a:lnTo>
-                <a:lnTo>
-                  <a:pt x="1201969" y="308959"/>
-                </a:lnTo>
-                <a:lnTo>
-                  <a:pt x="1185295" y="267684"/>
-                </a:lnTo>
-                <a:lnTo>
-                  <a:pt x="1169779" y="226169"/>
-                </a:lnTo>
-                <a:lnTo>
-                  <a:pt x="1155051" y="185373"/>
-                </a:lnTo>
-                <a:lnTo>
-                  <a:pt x="1140740" y="146256"/>
-                </a:lnTo>
-                <a:lnTo>
-                  <a:pt x="1126479" y="109776"/>
-                </a:lnTo>
-                <a:lnTo>
-                  <a:pt x="1096622" y="48566"/>
-                </a:lnTo>
-                <a:lnTo>
-                  <a:pt x="1062521" y="9416"/>
-                </a:lnTo>
-                <a:lnTo>
-                  <a:pt x="1021219" y="0"/>
-                </a:lnTo>
-                <a:lnTo>
-                  <a:pt x="996942" y="8839"/>
-                </a:lnTo>
-                <a:lnTo>
-                  <a:pt x="939292" y="58408"/>
-                </a:lnTo>
-                <a:lnTo>
-                  <a:pt x="905626" y="102170"/>
-                </a:lnTo>
-                <a:lnTo>
-                  <a:pt x="867636" y="161559"/>
-                </a:lnTo>
-                <a:lnTo>
-                  <a:pt x="847205" y="196518"/>
-                </a:lnTo>
-                <a:lnTo>
-                  <a:pt x="825914" y="234669"/>
-                </a:lnTo>
-                <a:lnTo>
-                  <a:pt x="803838" y="275773"/>
-                </a:lnTo>
-                <a:lnTo>
-                  <a:pt x="781051" y="319592"/>
-                </a:lnTo>
-                <a:lnTo>
-                  <a:pt x="757625" y="365888"/>
-                </a:lnTo>
-                <a:lnTo>
-                  <a:pt x="733636" y="414423"/>
-                </a:lnTo>
-                <a:lnTo>
-                  <a:pt x="709156" y="464958"/>
-                </a:lnTo>
-                <a:lnTo>
-                  <a:pt x="684261" y="517256"/>
-                </a:lnTo>
-                <a:lnTo>
-                  <a:pt x="659023" y="571077"/>
-                </a:lnTo>
-                <a:lnTo>
-                  <a:pt x="633516" y="626183"/>
-                </a:lnTo>
-                <a:lnTo>
-                  <a:pt x="607815" y="682337"/>
-                </a:lnTo>
-                <a:lnTo>
-                  <a:pt x="581993" y="739300"/>
-                </a:lnTo>
-                <a:lnTo>
-                  <a:pt x="556124" y="796833"/>
-                </a:lnTo>
-                <a:lnTo>
-                  <a:pt x="530281" y="854699"/>
-                </a:lnTo>
-                <a:lnTo>
-                  <a:pt x="504540" y="912658"/>
-                </a:lnTo>
-                <a:lnTo>
-                  <a:pt x="478972" y="970474"/>
-                </a:lnTo>
-                <a:lnTo>
-                  <a:pt x="453654" y="1027906"/>
-                </a:lnTo>
-                <a:lnTo>
-                  <a:pt x="428657" y="1084718"/>
-                </a:lnTo>
-                <a:lnTo>
-                  <a:pt x="404057" y="1140671"/>
-                </a:lnTo>
-                <a:lnTo>
-                  <a:pt x="379926" y="1195527"/>
-                </a:lnTo>
-                <a:lnTo>
-                  <a:pt x="356339" y="1249046"/>
-                </a:lnTo>
-                <a:lnTo>
-                  <a:pt x="333370" y="1300992"/>
-                </a:lnTo>
-                <a:lnTo>
-                  <a:pt x="311092" y="1351125"/>
-                </a:lnTo>
-                <a:lnTo>
-                  <a:pt x="289580" y="1399208"/>
-                </a:lnTo>
-                <a:lnTo>
-                  <a:pt x="268906" y="1445002"/>
-                </a:lnTo>
-                <a:lnTo>
-                  <a:pt x="249146" y="1488269"/>
-                </a:lnTo>
-                <a:lnTo>
-                  <a:pt x="230373" y="1528770"/>
-                </a:lnTo>
-                <a:lnTo>
-                  <a:pt x="212660" y="1566267"/>
-                </a:lnTo>
-                <a:lnTo>
-                  <a:pt x="180711" y="1631298"/>
-                </a:lnTo>
-                <a:lnTo>
-                  <a:pt x="119868" y="1743180"/>
-                </a:lnTo>
-                <a:lnTo>
-                  <a:pt x="83080" y="1804273"/>
-                </a:lnTo>
-                <a:lnTo>
-                  <a:pt x="55014" y="1844599"/>
-                </a:lnTo>
-                <a:lnTo>
-                  <a:pt x="20063" y="1874819"/>
-                </a:lnTo>
-                <a:lnTo>
-                  <a:pt x="10686" y="1870647"/>
-                </a:lnTo>
-                <a:lnTo>
-                  <a:pt x="5047" y="1857574"/>
-                </a:lnTo>
-                <a:lnTo>
-                  <a:pt x="1900" y="1838568"/>
-                </a:lnTo>
-                <a:lnTo>
-                  <a:pt x="0" y="1816596"/>
-                </a:lnTo>
-              </a:path>
-            </a:pathLst>
-          </a:custGeom>
-          <a:ln w="64007">
-            <a:solidFill>
-              <a:srgbClr val="7E5F00"/>
-            </a:solidFill>
-          </a:ln>
-        </p:spPr>
-        <p:txBody>
-          <a:bodyPr wrap="square" lIns="0" tIns="0" rIns="0" bIns="0" rtlCol="0"/>
-          <a:lstStyle/>
-          <a:p>
-            <a:endParaRPr/>
-          </a:p>
-        </p:txBody>
-      </p:sp>
-      <p:sp>
-        <p:nvSpPr>
           <p:cNvPr id="19" name="object 13">
             <a:extLst>
               <a:ext uri="{FF2B5EF4-FFF2-40B4-BE49-F238E27FC236}">
@@ -10168,7 +9875,7 @@
         </p:nvSpPr>
         <p:spPr>
           <a:xfrm>
-            <a:off x="4005477" y="2382478"/>
+            <a:off x="3907773" y="2944314"/>
             <a:ext cx="3558540" cy="1664588"/>
           </a:xfrm>
           <a:prstGeom prst="rect">
@@ -10241,10 +9948,6 @@
               </a:rPr>
               <a:t>w</a:t>
             </a:r>
-            <a:endParaRPr sz="2400">
-              <a:latin typeface="Calibri"/>
-              <a:cs typeface="Calibri"/>
-            </a:endParaRPr>
           </a:p>
           <a:p>
             <a:pPr marL="469900" indent="-457200">
@@ -10286,161 +9989,10 @@
               </a:rPr>
               <a:t>𝜕𝑤</a:t>
             </a:r>
-            <a:endParaRPr sz="2400">
+            <a:endParaRPr sz="2400" dirty="0">
               <a:latin typeface="Cambria Math"/>
               <a:cs typeface="Cambria Math"/>
             </a:endParaRPr>
-          </a:p>
-        </p:txBody>
-      </p:sp>
-      <p:sp>
-        <p:nvSpPr>
-          <p:cNvPr id="20" name="object 37">
-            <a:extLst>
-              <a:ext uri="{FF2B5EF4-FFF2-40B4-BE49-F238E27FC236}">
-                <a16:creationId xmlns:a16="http://schemas.microsoft.com/office/drawing/2014/main" id="{4F50C5C3-6183-A2CB-4550-BDB8DEA493DC}"/>
-              </a:ext>
-            </a:extLst>
-          </p:cNvPr>
-          <p:cNvSpPr/>
-          <p:nvPr/>
-        </p:nvSpPr>
-        <p:spPr>
-          <a:xfrm>
-            <a:off x="3106572" y="2940049"/>
-            <a:ext cx="1348105" cy="1243330"/>
-          </a:xfrm>
-          <a:custGeom>
-            <a:avLst/>
-            <a:gdLst/>
-            <a:ahLst/>
-            <a:cxnLst/>
-            <a:rect l="l" t="t" r="r" b="b"/>
-            <a:pathLst>
-              <a:path w="1348104" h="1243329">
-                <a:moveTo>
-                  <a:pt x="69087" y="1061466"/>
-                </a:moveTo>
-                <a:lnTo>
-                  <a:pt x="0" y="1242949"/>
-                </a:lnTo>
-                <a:lnTo>
-                  <a:pt x="186689" y="1189355"/>
-                </a:lnTo>
-                <a:lnTo>
-                  <a:pt x="165435" y="1166241"/>
-                </a:lnTo>
-                <a:lnTo>
-                  <a:pt x="126111" y="1166241"/>
-                </a:lnTo>
-                <a:lnTo>
-                  <a:pt x="86994" y="1123696"/>
-                </a:lnTo>
-                <a:lnTo>
-                  <a:pt x="108295" y="1104102"/>
-                </a:lnTo>
-                <a:lnTo>
-                  <a:pt x="69087" y="1061466"/>
-                </a:lnTo>
-                <a:close/>
-              </a:path>
-              <a:path w="1348104" h="1243329">
-                <a:moveTo>
-                  <a:pt x="108295" y="1104102"/>
-                </a:moveTo>
-                <a:lnTo>
-                  <a:pt x="86994" y="1123696"/>
-                </a:lnTo>
-                <a:lnTo>
-                  <a:pt x="126111" y="1166241"/>
-                </a:lnTo>
-                <a:lnTo>
-                  <a:pt x="147417" y="1146646"/>
-                </a:lnTo>
-                <a:lnTo>
-                  <a:pt x="108295" y="1104102"/>
-                </a:lnTo>
-                <a:close/>
-              </a:path>
-              <a:path w="1348104" h="1243329">
-                <a:moveTo>
-                  <a:pt x="147417" y="1146646"/>
-                </a:moveTo>
-                <a:lnTo>
-                  <a:pt x="126111" y="1166241"/>
-                </a:lnTo>
-                <a:lnTo>
-                  <a:pt x="165435" y="1166241"/>
-                </a:lnTo>
-                <a:lnTo>
-                  <a:pt x="147417" y="1146646"/>
-                </a:lnTo>
-                <a:close/>
-              </a:path>
-              <a:path w="1348104" h="1243329">
-                <a:moveTo>
-                  <a:pt x="1308608" y="0"/>
-                </a:moveTo>
-                <a:lnTo>
-                  <a:pt x="108295" y="1104102"/>
-                </a:lnTo>
-                <a:lnTo>
-                  <a:pt x="147417" y="1146646"/>
-                </a:lnTo>
-                <a:lnTo>
-                  <a:pt x="1347851" y="42672"/>
-                </a:lnTo>
-                <a:lnTo>
-                  <a:pt x="1308608" y="0"/>
-                </a:lnTo>
-                <a:close/>
-              </a:path>
-            </a:pathLst>
-          </a:custGeom>
-          <a:solidFill>
-            <a:srgbClr val="0000FF"/>
-          </a:solidFill>
-        </p:spPr>
-        <p:txBody>
-          <a:bodyPr wrap="square" lIns="0" tIns="0" rIns="0" bIns="0" rtlCol="0"/>
-          <a:lstStyle/>
-          <a:p>
-            <a:endParaRPr/>
-          </a:p>
-        </p:txBody>
-      </p:sp>
-      <p:sp>
-        <p:nvSpPr>
-          <p:cNvPr id="21" name="object 39">
-            <a:extLst>
-              <a:ext uri="{FF2B5EF4-FFF2-40B4-BE49-F238E27FC236}">
-                <a16:creationId xmlns:a16="http://schemas.microsoft.com/office/drawing/2014/main" id="{39D35F59-A861-9F7C-9D33-F1DC42760F64}"/>
-              </a:ext>
-            </a:extLst>
-          </p:cNvPr>
-          <p:cNvSpPr/>
-          <p:nvPr/>
-        </p:nvSpPr>
-        <p:spPr>
-          <a:xfrm>
-            <a:off x="2478682" y="3173222"/>
-            <a:ext cx="1164336" cy="1164336"/>
-          </a:xfrm>
-          <a:prstGeom prst="rect">
-            <a:avLst/>
-          </a:prstGeom>
-          <a:blipFill>
-            <a:blip r:embed="rId3" cstate="print"/>
-            <a:stretch>
-              <a:fillRect/>
-            </a:stretch>
-          </a:blipFill>
-        </p:spPr>
-        <p:txBody>
-          <a:bodyPr wrap="square" lIns="0" tIns="0" rIns="0" bIns="0" rtlCol="0"/>
-          <a:lstStyle/>
-          <a:p>
-            <a:endParaRPr/>
           </a:p>
         </p:txBody>
       </p:sp>
@@ -10589,370 +10141,1595 @@
           </a:p>
         </p:txBody>
       </p:sp>
-      <p:sp>
-        <p:nvSpPr>
-          <p:cNvPr id="23" name="object 14">
+      <p:grpSp>
+        <p:nvGrpSpPr>
+          <p:cNvPr id="2" name="Group 1">
             <a:extLst>
               <a:ext uri="{FF2B5EF4-FFF2-40B4-BE49-F238E27FC236}">
-                <a16:creationId xmlns:a16="http://schemas.microsoft.com/office/drawing/2014/main" id="{C23E3787-8F9F-309F-BB56-55A04A547CDF}"/>
+                <a16:creationId xmlns:a16="http://schemas.microsoft.com/office/drawing/2014/main" id="{62AD4E98-7F8C-9AFF-343E-D068DAEC2E16}"/>
               </a:ext>
             </a:extLst>
           </p:cNvPr>
-          <p:cNvSpPr/>
-          <p:nvPr/>
-        </p:nvSpPr>
-        <p:spPr>
-          <a:xfrm>
-            <a:off x="2450994" y="3637724"/>
-            <a:ext cx="1591310" cy="1508125"/>
-          </a:xfrm>
-          <a:custGeom>
-            <a:avLst/>
-            <a:gdLst/>
-            <a:ahLst/>
-            <a:cxnLst/>
-            <a:rect l="l" t="t" r="r" b="b"/>
-            <a:pathLst>
-              <a:path w="1591310" h="1508125">
-                <a:moveTo>
-                  <a:pt x="0" y="0"/>
-                </a:moveTo>
-                <a:lnTo>
-                  <a:pt x="1591310" y="1507998"/>
-                </a:lnTo>
-              </a:path>
-            </a:pathLst>
-          </a:custGeom>
-          <a:ln w="57912">
+          <p:cNvGrpSpPr/>
+          <p:nvPr/>
+        </p:nvGrpSpPr>
+        <p:grpSpPr>
+          <a:xfrm>
+            <a:off x="400455" y="2458755"/>
+            <a:ext cx="9762575" cy="4399245"/>
+            <a:chOff x="400455" y="2458755"/>
+            <a:chExt cx="9762575" cy="4399245"/>
+          </a:xfrm>
+        </p:grpSpPr>
+        <p:sp>
+          <p:nvSpPr>
+            <p:cNvPr id="15" name="object 6">
+              <a:extLst>
+                <a:ext uri="{FF2B5EF4-FFF2-40B4-BE49-F238E27FC236}">
+                  <a16:creationId xmlns:a16="http://schemas.microsoft.com/office/drawing/2014/main" id="{0D5CB11C-EC98-27DD-EEE8-8759E67221D4}"/>
+                </a:ext>
+              </a:extLst>
+            </p:cNvPr>
+            <p:cNvSpPr/>
+            <p:nvPr/>
+          </p:nvSpPr>
+          <p:spPr>
+            <a:xfrm>
+              <a:off x="1546589" y="6232893"/>
+              <a:ext cx="8281670" cy="114300"/>
+            </a:xfrm>
+            <a:custGeom>
+              <a:avLst/>
+              <a:gdLst/>
+              <a:ahLst/>
+              <a:cxnLst/>
+              <a:rect l="l" t="t" r="r" b="b"/>
+              <a:pathLst>
+                <a:path w="8281670" h="114300">
+                  <a:moveTo>
+                    <a:pt x="8166861" y="0"/>
+                  </a:moveTo>
+                  <a:lnTo>
+                    <a:pt x="8166861" y="114299"/>
+                  </a:lnTo>
+                  <a:lnTo>
+                    <a:pt x="8243061" y="76199"/>
+                  </a:lnTo>
+                  <a:lnTo>
+                    <a:pt x="8185911" y="76199"/>
+                  </a:lnTo>
+                  <a:lnTo>
+                    <a:pt x="8185911" y="38099"/>
+                  </a:lnTo>
+                  <a:lnTo>
+                    <a:pt x="8243061" y="38099"/>
+                  </a:lnTo>
+                  <a:lnTo>
+                    <a:pt x="8166861" y="0"/>
+                  </a:lnTo>
+                  <a:close/>
+                </a:path>
+                <a:path w="8281670" h="114300">
+                  <a:moveTo>
+                    <a:pt x="8166861" y="38099"/>
+                  </a:moveTo>
+                  <a:lnTo>
+                    <a:pt x="0" y="38099"/>
+                  </a:lnTo>
+                  <a:lnTo>
+                    <a:pt x="0" y="76199"/>
+                  </a:lnTo>
+                  <a:lnTo>
+                    <a:pt x="8166861" y="76199"/>
+                  </a:lnTo>
+                  <a:lnTo>
+                    <a:pt x="8166861" y="38099"/>
+                  </a:lnTo>
+                  <a:close/>
+                </a:path>
+                <a:path w="8281670" h="114300">
+                  <a:moveTo>
+                    <a:pt x="8243061" y="38099"/>
+                  </a:moveTo>
+                  <a:lnTo>
+                    <a:pt x="8185911" y="38099"/>
+                  </a:lnTo>
+                  <a:lnTo>
+                    <a:pt x="8185911" y="76199"/>
+                  </a:lnTo>
+                  <a:lnTo>
+                    <a:pt x="8243061" y="76199"/>
+                  </a:lnTo>
+                  <a:lnTo>
+                    <a:pt x="8281161" y="57149"/>
+                  </a:lnTo>
+                  <a:lnTo>
+                    <a:pt x="8243061" y="38099"/>
+                  </a:lnTo>
+                  <a:close/>
+                </a:path>
+              </a:pathLst>
+            </a:custGeom>
+            <a:solidFill>
+              <a:srgbClr val="000000"/>
+            </a:solidFill>
+          </p:spPr>
+          <p:txBody>
+            <a:bodyPr wrap="square" lIns="0" tIns="0" rIns="0" bIns="0" rtlCol="0"/>
+            <a:lstStyle/>
+            <a:p>
+              <a:endParaRPr/>
+            </a:p>
+          </p:txBody>
+        </p:sp>
+        <p:sp>
+          <p:nvSpPr>
+            <p:cNvPr id="16" name="object 7">
+              <a:extLst>
+                <a:ext uri="{FF2B5EF4-FFF2-40B4-BE49-F238E27FC236}">
+                  <a16:creationId xmlns:a16="http://schemas.microsoft.com/office/drawing/2014/main" id="{22E5B4D3-AC75-53B1-1F02-64E308FC7669}"/>
+                </a:ext>
+              </a:extLst>
+            </p:cNvPr>
+            <p:cNvSpPr txBox="1"/>
+            <p:nvPr/>
+          </p:nvSpPr>
+          <p:spPr>
+            <a:xfrm>
+              <a:off x="9350743" y="6200382"/>
+              <a:ext cx="242570" cy="415925"/>
+            </a:xfrm>
+            <a:prstGeom prst="rect">
+              <a:avLst/>
+            </a:prstGeom>
+          </p:spPr>
+          <p:txBody>
+            <a:bodyPr vert="horz" wrap="square" lIns="0" tIns="13970" rIns="0" bIns="0" rtlCol="0">
+              <a:spAutoFit/>
+            </a:bodyPr>
+            <a:lstStyle/>
+            <a:p>
+              <a:pPr marL="12700">
+                <a:spcBef>
+                  <a:spcPts val="110"/>
+                </a:spcBef>
+              </a:pPr>
+              <a:r>
+                <a:rPr sz="2550" i="1" dirty="0">
+                  <a:latin typeface="Times New Roman"/>
+                  <a:cs typeface="Times New Roman"/>
+                </a:rPr>
+                <a:t>w</a:t>
+              </a:r>
+              <a:endParaRPr sz="2550">
+                <a:latin typeface="Times New Roman"/>
+                <a:cs typeface="Times New Roman"/>
+              </a:endParaRPr>
+            </a:p>
+          </p:txBody>
+        </p:sp>
+        <p:sp>
+          <p:nvSpPr>
+            <p:cNvPr id="17" name="object 9">
+              <a:extLst>
+                <a:ext uri="{FF2B5EF4-FFF2-40B4-BE49-F238E27FC236}">
+                  <a16:creationId xmlns:a16="http://schemas.microsoft.com/office/drawing/2014/main" id="{7668A112-56D0-80A9-6C6E-FEB6623F4F3A}"/>
+                </a:ext>
+              </a:extLst>
+            </p:cNvPr>
+            <p:cNvSpPr/>
+            <p:nvPr/>
+          </p:nvSpPr>
+          <p:spPr>
+            <a:xfrm>
+              <a:off x="2013695" y="2645398"/>
+              <a:ext cx="6681470" cy="4209415"/>
+            </a:xfrm>
+            <a:custGeom>
+              <a:avLst/>
+              <a:gdLst/>
+              <a:ahLst/>
+              <a:cxnLst/>
+              <a:rect l="l" t="t" r="r" b="b"/>
+              <a:pathLst>
+                <a:path w="6681470" h="4209415">
+                  <a:moveTo>
+                    <a:pt x="0" y="0"/>
+                  </a:moveTo>
+                  <a:lnTo>
+                    <a:pt x="11304" y="55642"/>
+                  </a:lnTo>
+                  <a:lnTo>
+                    <a:pt x="23084" y="110995"/>
+                  </a:lnTo>
+                  <a:lnTo>
+                    <a:pt x="35337" y="166048"/>
+                  </a:lnTo>
+                  <a:lnTo>
+                    <a:pt x="48062" y="220789"/>
+                  </a:lnTo>
+                  <a:lnTo>
+                    <a:pt x="61255" y="275206"/>
+                  </a:lnTo>
+                  <a:lnTo>
+                    <a:pt x="74914" y="329288"/>
+                  </a:lnTo>
+                  <a:lnTo>
+                    <a:pt x="89037" y="383022"/>
+                  </a:lnTo>
+                  <a:lnTo>
+                    <a:pt x="103621" y="436397"/>
+                  </a:lnTo>
+                  <a:lnTo>
+                    <a:pt x="118664" y="489402"/>
+                  </a:lnTo>
+                  <a:lnTo>
+                    <a:pt x="134163" y="542025"/>
+                  </a:lnTo>
+                  <a:lnTo>
+                    <a:pt x="150117" y="594253"/>
+                  </a:lnTo>
+                  <a:lnTo>
+                    <a:pt x="166521" y="646076"/>
+                  </a:lnTo>
+                  <a:lnTo>
+                    <a:pt x="183375" y="697482"/>
+                  </a:lnTo>
+                  <a:lnTo>
+                    <a:pt x="200676" y="748459"/>
+                  </a:lnTo>
+                  <a:lnTo>
+                    <a:pt x="218421" y="798995"/>
+                  </a:lnTo>
+                  <a:lnTo>
+                    <a:pt x="236608" y="849079"/>
+                  </a:lnTo>
+                  <a:lnTo>
+                    <a:pt x="255234" y="898699"/>
+                  </a:lnTo>
+                  <a:lnTo>
+                    <a:pt x="274297" y="947843"/>
+                  </a:lnTo>
+                  <a:lnTo>
+                    <a:pt x="293794" y="996499"/>
+                  </a:lnTo>
+                  <a:lnTo>
+                    <a:pt x="313724" y="1044657"/>
+                  </a:lnTo>
+                  <a:lnTo>
+                    <a:pt x="334083" y="1092304"/>
+                  </a:lnTo>
+                  <a:lnTo>
+                    <a:pt x="354870" y="1139429"/>
+                  </a:lnTo>
+                  <a:lnTo>
+                    <a:pt x="376081" y="1186019"/>
+                  </a:lnTo>
+                  <a:lnTo>
+                    <a:pt x="397715" y="1232064"/>
+                  </a:lnTo>
+                  <a:lnTo>
+                    <a:pt x="419768" y="1277552"/>
+                  </a:lnTo>
+                  <a:lnTo>
+                    <a:pt x="442239" y="1322470"/>
+                  </a:lnTo>
+                  <a:lnTo>
+                    <a:pt x="465125" y="1366807"/>
+                  </a:lnTo>
+                  <a:lnTo>
+                    <a:pt x="488424" y="1410552"/>
+                  </a:lnTo>
+                  <a:lnTo>
+                    <a:pt x="512133" y="1453693"/>
+                  </a:lnTo>
+                  <a:lnTo>
+                    <a:pt x="536250" y="1496218"/>
+                  </a:lnTo>
+                  <a:lnTo>
+                    <a:pt x="560772" y="1538116"/>
+                  </a:lnTo>
+                  <a:lnTo>
+                    <a:pt x="585697" y="1579375"/>
+                  </a:lnTo>
+                  <a:lnTo>
+                    <a:pt x="611022" y="1619982"/>
+                  </a:lnTo>
+                  <a:lnTo>
+                    <a:pt x="636746" y="1659927"/>
+                  </a:lnTo>
+                  <a:lnTo>
+                    <a:pt x="662865" y="1699198"/>
+                  </a:lnTo>
+                  <a:lnTo>
+                    <a:pt x="689377" y="1737783"/>
+                  </a:lnTo>
+                  <a:lnTo>
+                    <a:pt x="716280" y="1775670"/>
+                  </a:lnTo>
+                  <a:lnTo>
+                    <a:pt x="743571" y="1812848"/>
+                  </a:lnTo>
+                  <a:lnTo>
+                    <a:pt x="771248" y="1849306"/>
+                  </a:lnTo>
+                  <a:lnTo>
+                    <a:pt x="799308" y="1885030"/>
+                  </a:lnTo>
+                  <a:lnTo>
+                    <a:pt x="827750" y="1920011"/>
+                  </a:lnTo>
+                  <a:lnTo>
+                    <a:pt x="856570" y="1954235"/>
+                  </a:lnTo>
+                  <a:lnTo>
+                    <a:pt x="885766" y="1987692"/>
+                  </a:lnTo>
+                  <a:lnTo>
+                    <a:pt x="915336" y="2020369"/>
+                  </a:lnTo>
+                  <a:lnTo>
+                    <a:pt x="945277" y="2052256"/>
+                  </a:lnTo>
+                  <a:lnTo>
+                    <a:pt x="975588" y="2083339"/>
+                  </a:lnTo>
+                  <a:lnTo>
+                    <a:pt x="1006264" y="2113609"/>
+                  </a:lnTo>
+                  <a:lnTo>
+                    <a:pt x="1037305" y="2143052"/>
+                  </a:lnTo>
+                  <a:lnTo>
+                    <a:pt x="1068707" y="2171658"/>
+                  </a:lnTo>
+                  <a:lnTo>
+                    <a:pt x="1100468" y="2199414"/>
+                  </a:lnTo>
+                  <a:lnTo>
+                    <a:pt x="1132586" y="2226310"/>
+                  </a:lnTo>
+                  <a:lnTo>
+                    <a:pt x="1168975" y="2255042"/>
+                  </a:lnTo>
+                  <a:lnTo>
+                    <a:pt x="1206504" y="2282598"/>
+                  </a:lnTo>
+                  <a:lnTo>
+                    <a:pt x="1245125" y="2309002"/>
+                  </a:lnTo>
+                  <a:lnTo>
+                    <a:pt x="1284793" y="2334278"/>
+                  </a:lnTo>
+                  <a:lnTo>
+                    <a:pt x="1325462" y="2358451"/>
+                  </a:lnTo>
+                  <a:lnTo>
+                    <a:pt x="1367088" y="2381544"/>
+                  </a:lnTo>
+                  <a:lnTo>
+                    <a:pt x="1409625" y="2403583"/>
+                  </a:lnTo>
+                  <a:lnTo>
+                    <a:pt x="1453027" y="2424590"/>
+                  </a:lnTo>
+                  <a:lnTo>
+                    <a:pt x="1497248" y="2444592"/>
+                  </a:lnTo>
+                  <a:lnTo>
+                    <a:pt x="1542244" y="2463611"/>
+                  </a:lnTo>
+                  <a:lnTo>
+                    <a:pt x="1587968" y="2481672"/>
+                  </a:lnTo>
+                  <a:lnTo>
+                    <a:pt x="1634376" y="2498799"/>
+                  </a:lnTo>
+                  <a:lnTo>
+                    <a:pt x="1681421" y="2515017"/>
+                  </a:lnTo>
+                  <a:lnTo>
+                    <a:pt x="1729059" y="2530350"/>
+                  </a:lnTo>
+                  <a:lnTo>
+                    <a:pt x="1777243" y="2544822"/>
+                  </a:lnTo>
+                  <a:lnTo>
+                    <a:pt x="1825929" y="2558457"/>
+                  </a:lnTo>
+                  <a:lnTo>
+                    <a:pt x="1875070" y="2571280"/>
+                  </a:lnTo>
+                  <a:lnTo>
+                    <a:pt x="1924621" y="2583315"/>
+                  </a:lnTo>
+                  <a:lnTo>
+                    <a:pt x="1974537" y="2594587"/>
+                  </a:lnTo>
+                  <a:lnTo>
+                    <a:pt x="2024772" y="2605118"/>
+                  </a:lnTo>
+                  <a:lnTo>
+                    <a:pt x="2075281" y="2614935"/>
+                  </a:lnTo>
+                  <a:lnTo>
+                    <a:pt x="2126018" y="2624060"/>
+                  </a:lnTo>
+                  <a:lnTo>
+                    <a:pt x="2176938" y="2632519"/>
+                  </a:lnTo>
+                  <a:lnTo>
+                    <a:pt x="2227995" y="2640335"/>
+                  </a:lnTo>
+                  <a:lnTo>
+                    <a:pt x="2279144" y="2647534"/>
+                  </a:lnTo>
+                  <a:lnTo>
+                    <a:pt x="2330339" y="2654138"/>
+                  </a:lnTo>
+                  <a:lnTo>
+                    <a:pt x="2381535" y="2660172"/>
+                  </a:lnTo>
+                  <a:lnTo>
+                    <a:pt x="2432685" y="2665662"/>
+                  </a:lnTo>
+                  <a:lnTo>
+                    <a:pt x="2483746" y="2670630"/>
+                  </a:lnTo>
+                  <a:lnTo>
+                    <a:pt x="2534671" y="2675101"/>
+                  </a:lnTo>
+                  <a:lnTo>
+                    <a:pt x="2585414" y="2679100"/>
+                  </a:lnTo>
+                  <a:lnTo>
+                    <a:pt x="2635931" y="2682650"/>
+                  </a:lnTo>
+                  <a:lnTo>
+                    <a:pt x="2686175" y="2685777"/>
+                  </a:lnTo>
+                  <a:lnTo>
+                    <a:pt x="2736102" y="2688504"/>
+                  </a:lnTo>
+                  <a:lnTo>
+                    <a:pt x="2785665" y="2690855"/>
+                  </a:lnTo>
+                  <a:lnTo>
+                    <a:pt x="2834820" y="2692855"/>
+                  </a:lnTo>
+                  <a:lnTo>
+                    <a:pt x="2883520" y="2694528"/>
+                  </a:lnTo>
+                  <a:lnTo>
+                    <a:pt x="2931720" y="2695898"/>
+                  </a:lnTo>
+                  <a:lnTo>
+                    <a:pt x="2979376" y="2696990"/>
+                  </a:lnTo>
+                  <a:lnTo>
+                    <a:pt x="3026440" y="2697828"/>
+                  </a:lnTo>
+                  <a:lnTo>
+                    <a:pt x="3072868" y="2698436"/>
+                  </a:lnTo>
+                  <a:lnTo>
+                    <a:pt x="3118614" y="2698838"/>
+                  </a:lnTo>
+                  <a:lnTo>
+                    <a:pt x="3163633" y="2699059"/>
+                  </a:lnTo>
+                  <a:lnTo>
+                    <a:pt x="3207879" y="2699123"/>
+                  </a:lnTo>
+                  <a:lnTo>
+                    <a:pt x="3251307" y="2699054"/>
+                  </a:lnTo>
+                  <a:lnTo>
+                    <a:pt x="3293872" y="2698877"/>
+                  </a:lnTo>
+                  <a:lnTo>
+                    <a:pt x="3342309" y="2700105"/>
+                  </a:lnTo>
+                  <a:lnTo>
+                    <a:pt x="3390715" y="2704222"/>
+                  </a:lnTo>
+                  <a:lnTo>
+                    <a:pt x="3439063" y="2711078"/>
+                  </a:lnTo>
+                  <a:lnTo>
+                    <a:pt x="3487324" y="2720522"/>
+                  </a:lnTo>
+                  <a:lnTo>
+                    <a:pt x="3535473" y="2732403"/>
+                  </a:lnTo>
+                  <a:lnTo>
+                    <a:pt x="3583482" y="2746570"/>
+                  </a:lnTo>
+                  <a:lnTo>
+                    <a:pt x="3631324" y="2762872"/>
+                  </a:lnTo>
+                  <a:lnTo>
+                    <a:pt x="3678971" y="2781159"/>
+                  </a:lnTo>
+                  <a:lnTo>
+                    <a:pt x="3726397" y="2801280"/>
+                  </a:lnTo>
+                  <a:lnTo>
+                    <a:pt x="3773574" y="2823083"/>
+                  </a:lnTo>
+                  <a:lnTo>
+                    <a:pt x="3820476" y="2846420"/>
+                  </a:lnTo>
+                  <a:lnTo>
+                    <a:pt x="3867075" y="2871137"/>
+                  </a:lnTo>
+                  <a:lnTo>
+                    <a:pt x="3913343" y="2897085"/>
+                  </a:lnTo>
+                  <a:lnTo>
+                    <a:pt x="3959255" y="2924113"/>
+                  </a:lnTo>
+                  <a:lnTo>
+                    <a:pt x="4004782" y="2952070"/>
+                  </a:lnTo>
+                  <a:lnTo>
+                    <a:pt x="4049897" y="2980806"/>
+                  </a:lnTo>
+                  <a:lnTo>
+                    <a:pt x="4094574" y="3010169"/>
+                  </a:lnTo>
+                  <a:lnTo>
+                    <a:pt x="4138786" y="3040009"/>
+                  </a:lnTo>
+                  <a:lnTo>
+                    <a:pt x="4182504" y="3070175"/>
+                  </a:lnTo>
+                  <a:lnTo>
+                    <a:pt x="4225702" y="3100516"/>
+                  </a:lnTo>
+                  <a:lnTo>
+                    <a:pt x="4268353" y="3130881"/>
+                  </a:lnTo>
+                  <a:lnTo>
+                    <a:pt x="4310430" y="3161120"/>
+                  </a:lnTo>
+                  <a:lnTo>
+                    <a:pt x="4351905" y="3191082"/>
+                  </a:lnTo>
+                  <a:lnTo>
+                    <a:pt x="4392752" y="3220616"/>
+                  </a:lnTo>
+                  <a:lnTo>
+                    <a:pt x="4432942" y="3249571"/>
+                  </a:lnTo>
+                  <a:lnTo>
+                    <a:pt x="4472450" y="3277797"/>
+                  </a:lnTo>
+                  <a:lnTo>
+                    <a:pt x="4511248" y="3305142"/>
+                  </a:lnTo>
+                  <a:lnTo>
+                    <a:pt x="4549308" y="3331456"/>
+                  </a:lnTo>
+                  <a:lnTo>
+                    <a:pt x="4586605" y="3356589"/>
+                  </a:lnTo>
+                  <a:lnTo>
+                    <a:pt x="4623109" y="3380388"/>
+                  </a:lnTo>
+                  <a:lnTo>
+                    <a:pt x="4658795" y="3402705"/>
+                  </a:lnTo>
+                  <a:lnTo>
+                    <a:pt x="4693635" y="3423387"/>
+                  </a:lnTo>
+                  <a:lnTo>
+                    <a:pt x="4727602" y="3442284"/>
+                  </a:lnTo>
+                  <a:lnTo>
+                    <a:pt x="4792809" y="3474120"/>
+                  </a:lnTo>
+                  <a:lnTo>
+                    <a:pt x="4854198" y="3497007"/>
+                  </a:lnTo>
+                  <a:lnTo>
+                    <a:pt x="4911552" y="3509738"/>
+                  </a:lnTo>
+                  <a:lnTo>
+                    <a:pt x="4938649" y="3511918"/>
+                  </a:lnTo>
+                  <a:lnTo>
+                    <a:pt x="4982820" y="3509893"/>
+                  </a:lnTo>
+                  <a:lnTo>
+                    <a:pt x="5023134" y="3501676"/>
+                  </a:lnTo>
+                  <a:lnTo>
+                    <a:pt x="5059838" y="3487750"/>
+                  </a:lnTo>
+                  <a:lnTo>
+                    <a:pt x="5093181" y="3468600"/>
+                  </a:lnTo>
+                  <a:lnTo>
+                    <a:pt x="5123411" y="3444710"/>
+                  </a:lnTo>
+                  <a:lnTo>
+                    <a:pt x="5150777" y="3416562"/>
+                  </a:lnTo>
+                  <a:lnTo>
+                    <a:pt x="5175527" y="3384642"/>
+                  </a:lnTo>
+                  <a:lnTo>
+                    <a:pt x="5197910" y="3349433"/>
+                  </a:lnTo>
+                  <a:lnTo>
+                    <a:pt x="5218174" y="3311419"/>
+                  </a:lnTo>
+                  <a:lnTo>
+                    <a:pt x="5236568" y="3271083"/>
+                  </a:lnTo>
+                  <a:lnTo>
+                    <a:pt x="5253341" y="3228910"/>
+                  </a:lnTo>
+                  <a:lnTo>
+                    <a:pt x="5268740" y="3185384"/>
+                  </a:lnTo>
+                  <a:lnTo>
+                    <a:pt x="5283015" y="3140988"/>
+                  </a:lnTo>
+                  <a:lnTo>
+                    <a:pt x="5296414" y="3096206"/>
+                  </a:lnTo>
+                  <a:lnTo>
+                    <a:pt x="5309185" y="3051522"/>
+                  </a:lnTo>
+                  <a:lnTo>
+                    <a:pt x="5321577" y="3007420"/>
+                  </a:lnTo>
+                  <a:lnTo>
+                    <a:pt x="5333838" y="2964384"/>
+                  </a:lnTo>
+                  <a:lnTo>
+                    <a:pt x="5346218" y="2922897"/>
+                  </a:lnTo>
+                  <a:lnTo>
+                    <a:pt x="5358964" y="2883444"/>
+                  </a:lnTo>
+                  <a:lnTo>
+                    <a:pt x="5372324" y="2846509"/>
+                  </a:lnTo>
+                  <a:lnTo>
+                    <a:pt x="5401885" y="2782126"/>
+                  </a:lnTo>
+                  <a:lnTo>
+                    <a:pt x="5440947" y="2720822"/>
+                  </a:lnTo>
+                  <a:lnTo>
+                    <a:pt x="5461045" y="2682881"/>
+                  </a:lnTo>
+                  <a:lnTo>
+                    <a:pt x="5479246" y="2642783"/>
+                  </a:lnTo>
+                  <a:lnTo>
+                    <a:pt x="5495920" y="2601486"/>
+                  </a:lnTo>
+                  <a:lnTo>
+                    <a:pt x="5511436" y="2559950"/>
+                  </a:lnTo>
+                  <a:lnTo>
+                    <a:pt x="5526164" y="2519135"/>
+                  </a:lnTo>
+                  <a:lnTo>
+                    <a:pt x="5540475" y="2479998"/>
+                  </a:lnTo>
+                  <a:lnTo>
+                    <a:pt x="5554736" y="2443500"/>
+                  </a:lnTo>
+                  <a:lnTo>
+                    <a:pt x="5584593" y="2382258"/>
+                  </a:lnTo>
+                  <a:lnTo>
+                    <a:pt x="5618694" y="2343082"/>
+                  </a:lnTo>
+                  <a:lnTo>
+                    <a:pt x="5659996" y="2333647"/>
+                  </a:lnTo>
+                  <a:lnTo>
+                    <a:pt x="5684273" y="2342480"/>
+                  </a:lnTo>
+                  <a:lnTo>
+                    <a:pt x="5741924" y="2392045"/>
+                  </a:lnTo>
+                  <a:lnTo>
+                    <a:pt x="5775589" y="2435851"/>
+                  </a:lnTo>
+                  <a:lnTo>
+                    <a:pt x="5813579" y="2495285"/>
+                  </a:lnTo>
+                  <a:lnTo>
+                    <a:pt x="5834010" y="2530266"/>
+                  </a:lnTo>
+                  <a:lnTo>
+                    <a:pt x="5855301" y="2568440"/>
+                  </a:lnTo>
+                  <a:lnTo>
+                    <a:pt x="5877377" y="2609567"/>
+                  </a:lnTo>
+                  <a:lnTo>
+                    <a:pt x="5900164" y="2653409"/>
+                  </a:lnTo>
+                  <a:lnTo>
+                    <a:pt x="5923590" y="2699728"/>
+                  </a:lnTo>
+                  <a:lnTo>
+                    <a:pt x="5947579" y="2748286"/>
+                  </a:lnTo>
+                  <a:lnTo>
+                    <a:pt x="5972059" y="2798844"/>
+                  </a:lnTo>
+                  <a:lnTo>
+                    <a:pt x="5996954" y="2851165"/>
+                  </a:lnTo>
+                  <a:lnTo>
+                    <a:pt x="6022192" y="2905009"/>
+                  </a:lnTo>
+                  <a:lnTo>
+                    <a:pt x="6047699" y="2960138"/>
+                  </a:lnTo>
+                  <a:lnTo>
+                    <a:pt x="6073400" y="3016314"/>
+                  </a:lnTo>
+                  <a:lnTo>
+                    <a:pt x="6099222" y="3073299"/>
+                  </a:lnTo>
+                  <a:lnTo>
+                    <a:pt x="6125091" y="3130854"/>
+                  </a:lnTo>
+                  <a:lnTo>
+                    <a:pt x="6150934" y="3188741"/>
+                  </a:lnTo>
+                  <a:lnTo>
+                    <a:pt x="6176675" y="3246722"/>
+                  </a:lnTo>
+                  <a:lnTo>
+                    <a:pt x="6202243" y="3304558"/>
+                  </a:lnTo>
+                  <a:lnTo>
+                    <a:pt x="6227561" y="3362011"/>
+                  </a:lnTo>
+                  <a:lnTo>
+                    <a:pt x="6252558" y="3418843"/>
+                  </a:lnTo>
+                  <a:lnTo>
+                    <a:pt x="6277158" y="3474815"/>
+                  </a:lnTo>
+                  <a:lnTo>
+                    <a:pt x="6301289" y="3529689"/>
+                  </a:lnTo>
+                  <a:lnTo>
+                    <a:pt x="6324876" y="3583227"/>
+                  </a:lnTo>
+                  <a:lnTo>
+                    <a:pt x="6347845" y="3635190"/>
+                  </a:lnTo>
+                  <a:lnTo>
+                    <a:pt x="6370123" y="3685340"/>
+                  </a:lnTo>
+                  <a:lnTo>
+                    <a:pt x="6391635" y="3733439"/>
+                  </a:lnTo>
+                  <a:lnTo>
+                    <a:pt x="6412309" y="3779249"/>
+                  </a:lnTo>
+                  <a:lnTo>
+                    <a:pt x="6432069" y="3822530"/>
+                  </a:lnTo>
+                  <a:lnTo>
+                    <a:pt x="6450842" y="3863045"/>
+                  </a:lnTo>
+                  <a:lnTo>
+                    <a:pt x="6468555" y="3900556"/>
+                  </a:lnTo>
+                  <a:lnTo>
+                    <a:pt x="6500504" y="3965610"/>
+                  </a:lnTo>
+                  <a:lnTo>
+                    <a:pt x="6561347" y="4077532"/>
+                  </a:lnTo>
+                  <a:lnTo>
+                    <a:pt x="6598135" y="4138646"/>
+                  </a:lnTo>
+                  <a:lnTo>
+                    <a:pt x="6626201" y="4178986"/>
+                  </a:lnTo>
+                  <a:lnTo>
+                    <a:pt x="6661152" y="4209217"/>
+                  </a:lnTo>
+                  <a:lnTo>
+                    <a:pt x="6670529" y="4205044"/>
+                  </a:lnTo>
+                  <a:lnTo>
+                    <a:pt x="6676168" y="4191968"/>
+                  </a:lnTo>
+                  <a:lnTo>
+                    <a:pt x="6679315" y="4172958"/>
+                  </a:lnTo>
+                  <a:lnTo>
+                    <a:pt x="6681216" y="4150982"/>
+                  </a:lnTo>
+                </a:path>
+              </a:pathLst>
+            </a:custGeom>
+            <a:ln w="64008">
+              <a:solidFill>
+                <a:srgbClr val="7E5F00"/>
+              </a:solidFill>
+            </a:ln>
+          </p:spPr>
+          <p:txBody>
+            <a:bodyPr wrap="square" lIns="0" tIns="0" rIns="0" bIns="0" rtlCol="0"/>
+            <a:lstStyle/>
+            <a:p>
+              <a:endParaRPr/>
+            </a:p>
+          </p:txBody>
+        </p:sp>
+        <p:sp>
+          <p:nvSpPr>
+            <p:cNvPr id="18" name="object 10">
+              <a:extLst>
+                <a:ext uri="{FF2B5EF4-FFF2-40B4-BE49-F238E27FC236}">
+                  <a16:creationId xmlns:a16="http://schemas.microsoft.com/office/drawing/2014/main" id="{811C844C-87EA-24E5-84E9-60E4EFEF2889}"/>
+                </a:ext>
+              </a:extLst>
+            </p:cNvPr>
+            <p:cNvSpPr/>
+            <p:nvPr/>
+          </p:nvSpPr>
+          <p:spPr>
+            <a:xfrm>
+              <a:off x="8679670" y="4982845"/>
+              <a:ext cx="1483360" cy="1875155"/>
+            </a:xfrm>
+            <a:custGeom>
+              <a:avLst/>
+              <a:gdLst/>
+              <a:ahLst/>
+              <a:cxnLst/>
+              <a:rect l="l" t="t" r="r" b="b"/>
+              <a:pathLst>
+                <a:path w="1483359" h="1875154">
+                  <a:moveTo>
+                    <a:pt x="1482852" y="1014506"/>
+                  </a:moveTo>
+                  <a:lnTo>
+                    <a:pt x="1463041" y="977358"/>
+                  </a:lnTo>
+                  <a:lnTo>
+                    <a:pt x="1444647" y="937039"/>
+                  </a:lnTo>
+                  <a:lnTo>
+                    <a:pt x="1427874" y="894883"/>
+                  </a:lnTo>
+                  <a:lnTo>
+                    <a:pt x="1412475" y="851374"/>
+                  </a:lnTo>
+                  <a:lnTo>
+                    <a:pt x="1398200" y="806994"/>
+                  </a:lnTo>
+                  <a:lnTo>
+                    <a:pt x="1384801" y="762229"/>
+                  </a:lnTo>
+                  <a:lnTo>
+                    <a:pt x="1372030" y="717560"/>
+                  </a:lnTo>
+                  <a:lnTo>
+                    <a:pt x="1359638" y="673473"/>
+                  </a:lnTo>
+                  <a:lnTo>
+                    <a:pt x="1347377" y="630451"/>
+                  </a:lnTo>
+                  <a:lnTo>
+                    <a:pt x="1334997" y="588976"/>
+                  </a:lnTo>
+                  <a:lnTo>
+                    <a:pt x="1322251" y="549534"/>
+                  </a:lnTo>
+                  <a:lnTo>
+                    <a:pt x="1308891" y="512607"/>
+                  </a:lnTo>
+                  <a:lnTo>
+                    <a:pt x="1279330" y="448234"/>
+                  </a:lnTo>
+                  <a:lnTo>
+                    <a:pt x="1240268" y="386954"/>
+                  </a:lnTo>
+                  <a:lnTo>
+                    <a:pt x="1220170" y="349036"/>
+                  </a:lnTo>
+                  <a:lnTo>
+                    <a:pt x="1201969" y="308959"/>
+                  </a:lnTo>
+                  <a:lnTo>
+                    <a:pt x="1185295" y="267684"/>
+                  </a:lnTo>
+                  <a:lnTo>
+                    <a:pt x="1169779" y="226169"/>
+                  </a:lnTo>
+                  <a:lnTo>
+                    <a:pt x="1155051" y="185373"/>
+                  </a:lnTo>
+                  <a:lnTo>
+                    <a:pt x="1140740" y="146256"/>
+                  </a:lnTo>
+                  <a:lnTo>
+                    <a:pt x="1126479" y="109776"/>
+                  </a:lnTo>
+                  <a:lnTo>
+                    <a:pt x="1096622" y="48566"/>
+                  </a:lnTo>
+                  <a:lnTo>
+                    <a:pt x="1062521" y="9416"/>
+                  </a:lnTo>
+                  <a:lnTo>
+                    <a:pt x="1021219" y="0"/>
+                  </a:lnTo>
+                  <a:lnTo>
+                    <a:pt x="996942" y="8839"/>
+                  </a:lnTo>
+                  <a:lnTo>
+                    <a:pt x="939292" y="58408"/>
+                  </a:lnTo>
+                  <a:lnTo>
+                    <a:pt x="905626" y="102170"/>
+                  </a:lnTo>
+                  <a:lnTo>
+                    <a:pt x="867636" y="161559"/>
+                  </a:lnTo>
+                  <a:lnTo>
+                    <a:pt x="847205" y="196518"/>
+                  </a:lnTo>
+                  <a:lnTo>
+                    <a:pt x="825914" y="234669"/>
+                  </a:lnTo>
+                  <a:lnTo>
+                    <a:pt x="803838" y="275773"/>
+                  </a:lnTo>
+                  <a:lnTo>
+                    <a:pt x="781051" y="319592"/>
+                  </a:lnTo>
+                  <a:lnTo>
+                    <a:pt x="757625" y="365888"/>
+                  </a:lnTo>
+                  <a:lnTo>
+                    <a:pt x="733636" y="414423"/>
+                  </a:lnTo>
+                  <a:lnTo>
+                    <a:pt x="709156" y="464958"/>
+                  </a:lnTo>
+                  <a:lnTo>
+                    <a:pt x="684261" y="517256"/>
+                  </a:lnTo>
+                  <a:lnTo>
+                    <a:pt x="659023" y="571077"/>
+                  </a:lnTo>
+                  <a:lnTo>
+                    <a:pt x="633516" y="626183"/>
+                  </a:lnTo>
+                  <a:lnTo>
+                    <a:pt x="607815" y="682337"/>
+                  </a:lnTo>
+                  <a:lnTo>
+                    <a:pt x="581993" y="739300"/>
+                  </a:lnTo>
+                  <a:lnTo>
+                    <a:pt x="556124" y="796833"/>
+                  </a:lnTo>
+                  <a:lnTo>
+                    <a:pt x="530281" y="854699"/>
+                  </a:lnTo>
+                  <a:lnTo>
+                    <a:pt x="504540" y="912658"/>
+                  </a:lnTo>
+                  <a:lnTo>
+                    <a:pt x="478972" y="970474"/>
+                  </a:lnTo>
+                  <a:lnTo>
+                    <a:pt x="453654" y="1027906"/>
+                  </a:lnTo>
+                  <a:lnTo>
+                    <a:pt x="428657" y="1084718"/>
+                  </a:lnTo>
+                  <a:lnTo>
+                    <a:pt x="404057" y="1140671"/>
+                  </a:lnTo>
+                  <a:lnTo>
+                    <a:pt x="379926" y="1195527"/>
+                  </a:lnTo>
+                  <a:lnTo>
+                    <a:pt x="356339" y="1249046"/>
+                  </a:lnTo>
+                  <a:lnTo>
+                    <a:pt x="333370" y="1300992"/>
+                  </a:lnTo>
+                  <a:lnTo>
+                    <a:pt x="311092" y="1351125"/>
+                  </a:lnTo>
+                  <a:lnTo>
+                    <a:pt x="289580" y="1399208"/>
+                  </a:lnTo>
+                  <a:lnTo>
+                    <a:pt x="268906" y="1445002"/>
+                  </a:lnTo>
+                  <a:lnTo>
+                    <a:pt x="249146" y="1488269"/>
+                  </a:lnTo>
+                  <a:lnTo>
+                    <a:pt x="230373" y="1528770"/>
+                  </a:lnTo>
+                  <a:lnTo>
+                    <a:pt x="212660" y="1566267"/>
+                  </a:lnTo>
+                  <a:lnTo>
+                    <a:pt x="180711" y="1631298"/>
+                  </a:lnTo>
+                  <a:lnTo>
+                    <a:pt x="119868" y="1743180"/>
+                  </a:lnTo>
+                  <a:lnTo>
+                    <a:pt x="83080" y="1804273"/>
+                  </a:lnTo>
+                  <a:lnTo>
+                    <a:pt x="55014" y="1844599"/>
+                  </a:lnTo>
+                  <a:lnTo>
+                    <a:pt x="20063" y="1874819"/>
+                  </a:lnTo>
+                  <a:lnTo>
+                    <a:pt x="10686" y="1870647"/>
+                  </a:lnTo>
+                  <a:lnTo>
+                    <a:pt x="5047" y="1857574"/>
+                  </a:lnTo>
+                  <a:lnTo>
+                    <a:pt x="1900" y="1838568"/>
+                  </a:lnTo>
+                  <a:lnTo>
+                    <a:pt x="0" y="1816596"/>
+                  </a:lnTo>
+                </a:path>
+              </a:pathLst>
+            </a:custGeom>
+            <a:ln w="64007">
+              <a:solidFill>
+                <a:srgbClr val="7E5F00"/>
+              </a:solidFill>
+            </a:ln>
+          </p:spPr>
+          <p:txBody>
+            <a:bodyPr wrap="square" lIns="0" tIns="0" rIns="0" bIns="0" rtlCol="0"/>
+            <a:lstStyle/>
+            <a:p>
+              <a:endParaRPr/>
+            </a:p>
+          </p:txBody>
+        </p:sp>
+        <p:sp>
+          <p:nvSpPr>
+            <p:cNvPr id="20" name="object 37">
+              <a:extLst>
+                <a:ext uri="{FF2B5EF4-FFF2-40B4-BE49-F238E27FC236}">
+                  <a16:creationId xmlns:a16="http://schemas.microsoft.com/office/drawing/2014/main" id="{4F50C5C3-6183-A2CB-4550-BDB8DEA493DC}"/>
+                </a:ext>
+              </a:extLst>
+            </p:cNvPr>
+            <p:cNvSpPr/>
+            <p:nvPr/>
+          </p:nvSpPr>
+          <p:spPr>
+            <a:xfrm>
+              <a:off x="3008868" y="3501885"/>
+              <a:ext cx="1348105" cy="1243330"/>
+            </a:xfrm>
+            <a:custGeom>
+              <a:avLst/>
+              <a:gdLst/>
+              <a:ahLst/>
+              <a:cxnLst/>
+              <a:rect l="l" t="t" r="r" b="b"/>
+              <a:pathLst>
+                <a:path w="1348104" h="1243329">
+                  <a:moveTo>
+                    <a:pt x="69087" y="1061466"/>
+                  </a:moveTo>
+                  <a:lnTo>
+                    <a:pt x="0" y="1242949"/>
+                  </a:lnTo>
+                  <a:lnTo>
+                    <a:pt x="186689" y="1189355"/>
+                  </a:lnTo>
+                  <a:lnTo>
+                    <a:pt x="165435" y="1166241"/>
+                  </a:lnTo>
+                  <a:lnTo>
+                    <a:pt x="126111" y="1166241"/>
+                  </a:lnTo>
+                  <a:lnTo>
+                    <a:pt x="86994" y="1123696"/>
+                  </a:lnTo>
+                  <a:lnTo>
+                    <a:pt x="108295" y="1104102"/>
+                  </a:lnTo>
+                  <a:lnTo>
+                    <a:pt x="69087" y="1061466"/>
+                  </a:lnTo>
+                  <a:close/>
+                </a:path>
+                <a:path w="1348104" h="1243329">
+                  <a:moveTo>
+                    <a:pt x="108295" y="1104102"/>
+                  </a:moveTo>
+                  <a:lnTo>
+                    <a:pt x="86994" y="1123696"/>
+                  </a:lnTo>
+                  <a:lnTo>
+                    <a:pt x="126111" y="1166241"/>
+                  </a:lnTo>
+                  <a:lnTo>
+                    <a:pt x="147417" y="1146646"/>
+                  </a:lnTo>
+                  <a:lnTo>
+                    <a:pt x="108295" y="1104102"/>
+                  </a:lnTo>
+                  <a:close/>
+                </a:path>
+                <a:path w="1348104" h="1243329">
+                  <a:moveTo>
+                    <a:pt x="147417" y="1146646"/>
+                  </a:moveTo>
+                  <a:lnTo>
+                    <a:pt x="126111" y="1166241"/>
+                  </a:lnTo>
+                  <a:lnTo>
+                    <a:pt x="165435" y="1166241"/>
+                  </a:lnTo>
+                  <a:lnTo>
+                    <a:pt x="147417" y="1146646"/>
+                  </a:lnTo>
+                  <a:close/>
+                </a:path>
+                <a:path w="1348104" h="1243329">
+                  <a:moveTo>
+                    <a:pt x="1308608" y="0"/>
+                  </a:moveTo>
+                  <a:lnTo>
+                    <a:pt x="108295" y="1104102"/>
+                  </a:lnTo>
+                  <a:lnTo>
+                    <a:pt x="147417" y="1146646"/>
+                  </a:lnTo>
+                  <a:lnTo>
+                    <a:pt x="1347851" y="42672"/>
+                  </a:lnTo>
+                  <a:lnTo>
+                    <a:pt x="1308608" y="0"/>
+                  </a:lnTo>
+                  <a:close/>
+                </a:path>
+              </a:pathLst>
+            </a:custGeom>
             <a:solidFill>
               <a:srgbClr val="0000FF"/>
             </a:solidFill>
-            <a:prstDash val="dash"/>
-          </a:ln>
-        </p:spPr>
-        <p:txBody>
-          <a:bodyPr wrap="square" lIns="0" tIns="0" rIns="0" bIns="0" rtlCol="0"/>
-          <a:lstStyle/>
-          <a:p>
-            <a:endParaRPr dirty="0"/>
-          </a:p>
-        </p:txBody>
-      </p:sp>
-      <p:sp>
-        <p:nvSpPr>
-          <p:cNvPr id="24" name="object 12">
-            <a:extLst>
-              <a:ext uri="{FF2B5EF4-FFF2-40B4-BE49-F238E27FC236}">
-                <a16:creationId xmlns:a16="http://schemas.microsoft.com/office/drawing/2014/main" id="{5E58C623-1407-6B34-D2B7-65FA3D570835}"/>
-              </a:ext>
-            </a:extLst>
-          </p:cNvPr>
-          <p:cNvSpPr/>
-          <p:nvPr/>
-        </p:nvSpPr>
-        <p:spPr>
-          <a:xfrm>
-            <a:off x="3106572" y="4234298"/>
-            <a:ext cx="0" cy="1471930"/>
-          </a:xfrm>
-          <a:custGeom>
-            <a:avLst/>
-            <a:gdLst/>
-            <a:ahLst/>
-            <a:cxnLst/>
-            <a:rect l="l" t="t" r="r" b="b"/>
-            <a:pathLst>
-              <a:path h="1471929">
-                <a:moveTo>
-                  <a:pt x="0" y="0"/>
-                </a:moveTo>
-                <a:lnTo>
-                  <a:pt x="0" y="1471879"/>
-                </a:lnTo>
-              </a:path>
-            </a:pathLst>
-          </a:custGeom>
-          <a:ln w="57912">
+          </p:spPr>
+          <p:txBody>
+            <a:bodyPr wrap="square" lIns="0" tIns="0" rIns="0" bIns="0" rtlCol="0"/>
+            <a:lstStyle/>
+            <a:p>
+              <a:endParaRPr/>
+            </a:p>
+          </p:txBody>
+        </p:sp>
+        <p:sp>
+          <p:nvSpPr>
+            <p:cNvPr id="21" name="object 39">
+              <a:extLst>
+                <a:ext uri="{FF2B5EF4-FFF2-40B4-BE49-F238E27FC236}">
+                  <a16:creationId xmlns:a16="http://schemas.microsoft.com/office/drawing/2014/main" id="{39D35F59-A861-9F7C-9D33-F1DC42760F64}"/>
+                </a:ext>
+              </a:extLst>
+            </p:cNvPr>
+            <p:cNvSpPr/>
+            <p:nvPr/>
+          </p:nvSpPr>
+          <p:spPr>
+            <a:xfrm>
+              <a:off x="2380978" y="3735058"/>
+              <a:ext cx="1164336" cy="1164336"/>
+            </a:xfrm>
+            <a:prstGeom prst="rect">
+              <a:avLst/>
+            </a:prstGeom>
+            <a:blipFill>
+              <a:blip r:embed="rId3" cstate="print"/>
+              <a:stretch>
+                <a:fillRect/>
+              </a:stretch>
+            </a:blipFill>
+          </p:spPr>
+          <p:txBody>
+            <a:bodyPr wrap="square" lIns="0" tIns="0" rIns="0" bIns="0" rtlCol="0"/>
+            <a:lstStyle/>
+            <a:p>
+              <a:endParaRPr/>
+            </a:p>
+          </p:txBody>
+        </p:sp>
+        <p:sp>
+          <p:nvSpPr>
+            <p:cNvPr id="23" name="object 14">
+              <a:extLst>
+                <a:ext uri="{FF2B5EF4-FFF2-40B4-BE49-F238E27FC236}">
+                  <a16:creationId xmlns:a16="http://schemas.microsoft.com/office/drawing/2014/main" id="{C23E3787-8F9F-309F-BB56-55A04A547CDF}"/>
+                </a:ext>
+              </a:extLst>
+            </p:cNvPr>
+            <p:cNvSpPr/>
+            <p:nvPr/>
+          </p:nvSpPr>
+          <p:spPr>
+            <a:xfrm>
+              <a:off x="2353290" y="4199560"/>
+              <a:ext cx="1591310" cy="1508125"/>
+            </a:xfrm>
+            <a:custGeom>
+              <a:avLst/>
+              <a:gdLst/>
+              <a:ahLst/>
+              <a:cxnLst/>
+              <a:rect l="l" t="t" r="r" b="b"/>
+              <a:pathLst>
+                <a:path w="1591310" h="1508125">
+                  <a:moveTo>
+                    <a:pt x="0" y="0"/>
+                  </a:moveTo>
+                  <a:lnTo>
+                    <a:pt x="1591310" y="1507998"/>
+                  </a:lnTo>
+                </a:path>
+              </a:pathLst>
+            </a:custGeom>
+            <a:ln w="57912">
+              <a:solidFill>
+                <a:srgbClr val="0000FF"/>
+              </a:solidFill>
+              <a:prstDash val="dash"/>
+            </a:ln>
+          </p:spPr>
+          <p:txBody>
+            <a:bodyPr wrap="square" lIns="0" tIns="0" rIns="0" bIns="0" rtlCol="0"/>
+            <a:lstStyle/>
+            <a:p>
+              <a:endParaRPr dirty="0"/>
+            </a:p>
+          </p:txBody>
+        </p:sp>
+        <p:sp>
+          <p:nvSpPr>
+            <p:cNvPr id="24" name="object 12">
+              <a:extLst>
+                <a:ext uri="{FF2B5EF4-FFF2-40B4-BE49-F238E27FC236}">
+                  <a16:creationId xmlns:a16="http://schemas.microsoft.com/office/drawing/2014/main" id="{5E58C623-1407-6B34-D2B7-65FA3D570835}"/>
+                </a:ext>
+              </a:extLst>
+            </p:cNvPr>
+            <p:cNvSpPr/>
+            <p:nvPr/>
+          </p:nvSpPr>
+          <p:spPr>
+            <a:xfrm>
+              <a:off x="3008868" y="4796134"/>
+              <a:ext cx="0" cy="1471930"/>
+            </a:xfrm>
+            <a:custGeom>
+              <a:avLst/>
+              <a:gdLst/>
+              <a:ahLst/>
+              <a:cxnLst/>
+              <a:rect l="l" t="t" r="r" b="b"/>
+              <a:pathLst>
+                <a:path h="1471929">
+                  <a:moveTo>
+                    <a:pt x="0" y="0"/>
+                  </a:moveTo>
+                  <a:lnTo>
+                    <a:pt x="0" y="1471879"/>
+                  </a:lnTo>
+                </a:path>
+              </a:pathLst>
+            </a:custGeom>
+            <a:ln w="57912">
+              <a:solidFill>
+                <a:srgbClr val="FF0000"/>
+              </a:solidFill>
+              <a:prstDash val="dash"/>
+            </a:ln>
+          </p:spPr>
+          <p:txBody>
+            <a:bodyPr wrap="square" lIns="0" tIns="0" rIns="0" bIns="0" rtlCol="0"/>
+            <a:lstStyle/>
+            <a:p>
+              <a:endParaRPr/>
+            </a:p>
+          </p:txBody>
+        </p:sp>
+        <p:sp>
+          <p:nvSpPr>
+            <p:cNvPr id="25" name="object 36">
+              <a:extLst>
+                <a:ext uri="{FF2B5EF4-FFF2-40B4-BE49-F238E27FC236}">
+                  <a16:creationId xmlns:a16="http://schemas.microsoft.com/office/drawing/2014/main" id="{322DC6FD-F80F-A9EA-CAD4-D7E1EE8123E6}"/>
+                </a:ext>
+              </a:extLst>
+            </p:cNvPr>
+            <p:cNvSpPr/>
+            <p:nvPr/>
+          </p:nvSpPr>
+          <p:spPr>
+            <a:xfrm>
+              <a:off x="3199368" y="6201261"/>
+              <a:ext cx="605155" cy="248920"/>
+            </a:xfrm>
+            <a:custGeom>
+              <a:avLst/>
+              <a:gdLst/>
+              <a:ahLst/>
+              <a:cxnLst/>
+              <a:rect l="l" t="t" r="r" b="b"/>
+              <a:pathLst>
+                <a:path w="605155" h="248920">
+                  <a:moveTo>
+                    <a:pt x="0" y="62103"/>
+                  </a:moveTo>
+                  <a:lnTo>
+                    <a:pt x="480821" y="62103"/>
+                  </a:lnTo>
+                  <a:lnTo>
+                    <a:pt x="480821" y="0"/>
+                  </a:lnTo>
+                  <a:lnTo>
+                    <a:pt x="605027" y="124206"/>
+                  </a:lnTo>
+                  <a:lnTo>
+                    <a:pt x="480821" y="248412"/>
+                  </a:lnTo>
+                  <a:lnTo>
+                    <a:pt x="480821" y="186309"/>
+                  </a:lnTo>
+                  <a:lnTo>
+                    <a:pt x="0" y="186309"/>
+                  </a:lnTo>
+                  <a:lnTo>
+                    <a:pt x="0" y="62103"/>
+                  </a:lnTo>
+                  <a:close/>
+                </a:path>
+              </a:pathLst>
+            </a:custGeom>
             <a:solidFill>
               <a:srgbClr val="FF0000"/>
             </a:solidFill>
-            <a:prstDash val="dash"/>
-          </a:ln>
-        </p:spPr>
-        <p:txBody>
-          <a:bodyPr wrap="square" lIns="0" tIns="0" rIns="0" bIns="0" rtlCol="0"/>
-          <a:lstStyle/>
-          <a:p>
-            <a:endParaRPr/>
-          </a:p>
-        </p:txBody>
-      </p:sp>
-      <p:sp>
-        <p:nvSpPr>
-          <p:cNvPr id="25" name="object 36">
-            <a:extLst>
-              <a:ext uri="{FF2B5EF4-FFF2-40B4-BE49-F238E27FC236}">
-                <a16:creationId xmlns:a16="http://schemas.microsoft.com/office/drawing/2014/main" id="{322DC6FD-F80F-A9EA-CAD4-D7E1EE8123E6}"/>
-              </a:ext>
-            </a:extLst>
-          </p:cNvPr>
-          <p:cNvSpPr/>
-          <p:nvPr/>
-        </p:nvSpPr>
-        <p:spPr>
-          <a:xfrm>
-            <a:off x="3297072" y="5639425"/>
-            <a:ext cx="605155" cy="248920"/>
-          </a:xfrm>
-          <a:custGeom>
-            <a:avLst/>
-            <a:gdLst/>
-            <a:ahLst/>
-            <a:cxnLst/>
-            <a:rect l="l" t="t" r="r" b="b"/>
-            <a:pathLst>
-              <a:path w="605155" h="248920">
-                <a:moveTo>
-                  <a:pt x="0" y="62103"/>
-                </a:moveTo>
-                <a:lnTo>
-                  <a:pt x="480821" y="62103"/>
-                </a:lnTo>
-                <a:lnTo>
-                  <a:pt x="480821" y="0"/>
-                </a:lnTo>
-                <a:lnTo>
-                  <a:pt x="605027" y="124206"/>
-                </a:lnTo>
-                <a:lnTo>
-                  <a:pt x="480821" y="248412"/>
-                </a:lnTo>
-                <a:lnTo>
-                  <a:pt x="480821" y="186309"/>
-                </a:lnTo>
-                <a:lnTo>
-                  <a:pt x="0" y="186309"/>
-                </a:lnTo>
-                <a:lnTo>
-                  <a:pt x="0" y="62103"/>
-                </a:lnTo>
-                <a:close/>
-              </a:path>
-            </a:pathLst>
-          </a:custGeom>
-          <a:solidFill>
-            <a:srgbClr val="FF0000"/>
-          </a:solidFill>
-          <a:ln w="12192">
+            <a:ln w="12192">
+              <a:solidFill>
+                <a:srgbClr val="FF0000"/>
+              </a:solidFill>
+            </a:ln>
+          </p:spPr>
+          <p:txBody>
+            <a:bodyPr wrap="square" lIns="0" tIns="0" rIns="0" bIns="0" rtlCol="0"/>
+            <a:lstStyle/>
+            <a:p>
+              <a:endParaRPr/>
+            </a:p>
+          </p:txBody>
+        </p:sp>
+        <p:sp>
+          <p:nvSpPr>
+            <p:cNvPr id="26" name="object 11">
+              <a:extLst>
+                <a:ext uri="{FF2B5EF4-FFF2-40B4-BE49-F238E27FC236}">
+                  <a16:creationId xmlns:a16="http://schemas.microsoft.com/office/drawing/2014/main" id="{472F3708-2511-52EB-5546-6DBF96A17973}"/>
+                </a:ext>
+              </a:extLst>
+            </p:cNvPr>
+            <p:cNvSpPr/>
+            <p:nvPr/>
+          </p:nvSpPr>
+          <p:spPr>
+            <a:xfrm>
+              <a:off x="2912095" y="6211617"/>
+              <a:ext cx="192024" cy="192024"/>
+            </a:xfrm>
+            <a:prstGeom prst="rect">
+              <a:avLst/>
+            </a:prstGeom>
+            <a:blipFill>
+              <a:blip r:embed="rId4" cstate="print"/>
+              <a:stretch>
+                <a:fillRect/>
+              </a:stretch>
+            </a:blipFill>
+          </p:spPr>
+          <p:txBody>
+            <a:bodyPr wrap="square" lIns="0" tIns="0" rIns="0" bIns="0" rtlCol="0"/>
+            <a:lstStyle/>
+            <a:p>
+              <a:endParaRPr/>
+            </a:p>
+          </p:txBody>
+        </p:sp>
+        <p:sp>
+          <p:nvSpPr>
+            <p:cNvPr id="27" name="object 3">
+              <a:extLst>
+                <a:ext uri="{FF2B5EF4-FFF2-40B4-BE49-F238E27FC236}">
+                  <a16:creationId xmlns:a16="http://schemas.microsoft.com/office/drawing/2014/main" id="{CCF72CF7-63E5-546D-7B41-8DECD16E0E1F}"/>
+                </a:ext>
+              </a:extLst>
+            </p:cNvPr>
+            <p:cNvSpPr txBox="1"/>
+            <p:nvPr/>
+          </p:nvSpPr>
+          <p:spPr>
+            <a:xfrm>
+              <a:off x="400455" y="3155222"/>
+              <a:ext cx="784225" cy="1137158"/>
+            </a:xfrm>
+            <a:prstGeom prst="rect">
+              <a:avLst/>
+            </a:prstGeom>
+          </p:spPr>
+          <p:txBody>
+            <a:bodyPr vert="horz" wrap="square" lIns="0" tIns="10795" rIns="0" bIns="0" rtlCol="0">
+              <a:spAutoFit/>
+            </a:bodyPr>
+            <a:lstStyle/>
+            <a:p>
+              <a:pPr marL="12700" marR="5080" indent="83820">
+                <a:lnSpc>
+                  <a:spcPct val="100400"/>
+                </a:lnSpc>
+                <a:spcBef>
+                  <a:spcPts val="85"/>
+                </a:spcBef>
+              </a:pPr>
+              <a:r>
+                <a:rPr sz="2400" spc="-55" dirty="0">
+                  <a:latin typeface="Calibri"/>
+                  <a:cs typeface="Calibri"/>
+                </a:rPr>
+                <a:t>Total  </a:t>
+              </a:r>
+              <a:r>
+                <a:rPr sz="2400" spc="-5" dirty="0">
+                  <a:latin typeface="Calibri"/>
+                  <a:cs typeface="Calibri"/>
+                </a:rPr>
+                <a:t>Loss</a:t>
+              </a:r>
+              <a:r>
+                <a:rPr sz="2400" spc="-90" dirty="0">
+                  <a:latin typeface="Calibri"/>
+                  <a:cs typeface="Calibri"/>
+                </a:rPr>
+                <a:t> </a:t>
+              </a:r>
+              <a:r>
+                <a:rPr sz="2400" dirty="0">
+                  <a:latin typeface="Cambria Math"/>
+                  <a:cs typeface="Cambria Math"/>
+                </a:rPr>
+                <a:t>𝐿</a:t>
+              </a:r>
+            </a:p>
+          </p:txBody>
+        </p:sp>
+        <p:sp>
+          <p:nvSpPr>
+            <p:cNvPr id="28" name="object 8">
+              <a:extLst>
+                <a:ext uri="{FF2B5EF4-FFF2-40B4-BE49-F238E27FC236}">
+                  <a16:creationId xmlns:a16="http://schemas.microsoft.com/office/drawing/2014/main" id="{0BAAFE4F-0CA0-6F8F-E10F-2E177A81C5D9}"/>
+                </a:ext>
+              </a:extLst>
+            </p:cNvPr>
+            <p:cNvSpPr/>
+            <p:nvPr/>
+          </p:nvSpPr>
+          <p:spPr>
+            <a:xfrm>
+              <a:off x="1477250" y="2458755"/>
+              <a:ext cx="173990" cy="3877310"/>
+            </a:xfrm>
+            <a:custGeom>
+              <a:avLst/>
+              <a:gdLst/>
+              <a:ahLst/>
+              <a:cxnLst/>
+              <a:rect l="l" t="t" r="r" b="b"/>
+              <a:pathLst>
+                <a:path w="173990" h="3877310">
+                  <a:moveTo>
+                    <a:pt x="115824" y="144779"/>
+                  </a:moveTo>
+                  <a:lnTo>
+                    <a:pt x="57912" y="144779"/>
+                  </a:lnTo>
+                  <a:lnTo>
+                    <a:pt x="57912" y="3877170"/>
+                  </a:lnTo>
+                  <a:lnTo>
+                    <a:pt x="115824" y="3877170"/>
+                  </a:lnTo>
+                  <a:lnTo>
+                    <a:pt x="115824" y="144779"/>
+                  </a:lnTo>
+                  <a:close/>
+                </a:path>
+                <a:path w="173990" h="3877310">
+                  <a:moveTo>
+                    <a:pt x="86868" y="0"/>
+                  </a:moveTo>
+                  <a:lnTo>
+                    <a:pt x="0" y="173735"/>
+                  </a:lnTo>
+                  <a:lnTo>
+                    <a:pt x="57912" y="173735"/>
+                  </a:lnTo>
+                  <a:lnTo>
+                    <a:pt x="57912" y="144779"/>
+                  </a:lnTo>
+                  <a:lnTo>
+                    <a:pt x="159258" y="144779"/>
+                  </a:lnTo>
+                  <a:lnTo>
+                    <a:pt x="86868" y="0"/>
+                  </a:lnTo>
+                  <a:close/>
+                </a:path>
+                <a:path w="173990" h="3877310">
+                  <a:moveTo>
+                    <a:pt x="159258" y="144779"/>
+                  </a:moveTo>
+                  <a:lnTo>
+                    <a:pt x="115824" y="144779"/>
+                  </a:lnTo>
+                  <a:lnTo>
+                    <a:pt x="115824" y="173735"/>
+                  </a:lnTo>
+                  <a:lnTo>
+                    <a:pt x="173735" y="173735"/>
+                  </a:lnTo>
+                  <a:lnTo>
+                    <a:pt x="159258" y="144779"/>
+                  </a:lnTo>
+                  <a:close/>
+                </a:path>
+              </a:pathLst>
+            </a:custGeom>
             <a:solidFill>
-              <a:srgbClr val="FF0000"/>
+              <a:srgbClr val="000000"/>
             </a:solidFill>
-          </a:ln>
-        </p:spPr>
-        <p:txBody>
-          <a:bodyPr wrap="square" lIns="0" tIns="0" rIns="0" bIns="0" rtlCol="0"/>
-          <a:lstStyle/>
-          <a:p>
-            <a:endParaRPr/>
-          </a:p>
-        </p:txBody>
-      </p:sp>
-      <p:sp>
-        <p:nvSpPr>
-          <p:cNvPr id="26" name="object 11">
-            <a:extLst>
-              <a:ext uri="{FF2B5EF4-FFF2-40B4-BE49-F238E27FC236}">
-                <a16:creationId xmlns:a16="http://schemas.microsoft.com/office/drawing/2014/main" id="{472F3708-2511-52EB-5546-6DBF96A17973}"/>
-              </a:ext>
-            </a:extLst>
-          </p:cNvPr>
-          <p:cNvSpPr/>
-          <p:nvPr/>
-        </p:nvSpPr>
-        <p:spPr>
-          <a:xfrm>
-            <a:off x="3009799" y="5649781"/>
-            <a:ext cx="192024" cy="192024"/>
-          </a:xfrm>
-          <a:prstGeom prst="rect">
-            <a:avLst/>
-          </a:prstGeom>
-          <a:blipFill>
-            <a:blip r:embed="rId4" cstate="print"/>
-            <a:stretch>
-              <a:fillRect/>
-            </a:stretch>
-          </a:blipFill>
-        </p:spPr>
-        <p:txBody>
-          <a:bodyPr wrap="square" lIns="0" tIns="0" rIns="0" bIns="0" rtlCol="0"/>
-          <a:lstStyle/>
-          <a:p>
-            <a:endParaRPr/>
-          </a:p>
-        </p:txBody>
-      </p:sp>
-      <p:sp>
-        <p:nvSpPr>
-          <p:cNvPr id="27" name="object 3">
-            <a:extLst>
-              <a:ext uri="{FF2B5EF4-FFF2-40B4-BE49-F238E27FC236}">
-                <a16:creationId xmlns:a16="http://schemas.microsoft.com/office/drawing/2014/main" id="{CCF72CF7-63E5-546D-7B41-8DECD16E0E1F}"/>
-              </a:ext>
-            </a:extLst>
-          </p:cNvPr>
-          <p:cNvSpPr txBox="1"/>
-          <p:nvPr/>
-        </p:nvSpPr>
-        <p:spPr>
-          <a:xfrm>
-            <a:off x="498159" y="2593386"/>
-            <a:ext cx="784225" cy="1137158"/>
-          </a:xfrm>
-          <a:prstGeom prst="rect">
-            <a:avLst/>
-          </a:prstGeom>
-        </p:spPr>
-        <p:txBody>
-          <a:bodyPr vert="horz" wrap="square" lIns="0" tIns="10795" rIns="0" bIns="0" rtlCol="0">
-            <a:spAutoFit/>
-          </a:bodyPr>
-          <a:lstStyle/>
-          <a:p>
-            <a:pPr marL="12700" marR="5080" indent="83820">
-              <a:lnSpc>
-                <a:spcPct val="100400"/>
-              </a:lnSpc>
-              <a:spcBef>
-                <a:spcPts val="85"/>
-              </a:spcBef>
-            </a:pPr>
-            <a:r>
-              <a:rPr sz="2400" spc="-55" dirty="0">
-                <a:latin typeface="Calibri"/>
-                <a:cs typeface="Calibri"/>
-              </a:rPr>
-              <a:t>Total  </a:t>
-            </a:r>
-            <a:r>
-              <a:rPr sz="2400" spc="-5" dirty="0">
-                <a:latin typeface="Calibri"/>
-                <a:cs typeface="Calibri"/>
-              </a:rPr>
-              <a:t>Loss</a:t>
-            </a:r>
-            <a:r>
-              <a:rPr sz="2400" spc="-90" dirty="0">
-                <a:latin typeface="Calibri"/>
-                <a:cs typeface="Calibri"/>
-              </a:rPr>
-              <a:t> </a:t>
-            </a:r>
-            <a:r>
-              <a:rPr sz="2400" dirty="0">
-                <a:latin typeface="Cambria Math"/>
-                <a:cs typeface="Cambria Math"/>
-              </a:rPr>
-              <a:t>𝐿</a:t>
-            </a:r>
-          </a:p>
-        </p:txBody>
-      </p:sp>
-      <p:sp>
-        <p:nvSpPr>
-          <p:cNvPr id="28" name="object 8">
-            <a:extLst>
-              <a:ext uri="{FF2B5EF4-FFF2-40B4-BE49-F238E27FC236}">
-                <a16:creationId xmlns:a16="http://schemas.microsoft.com/office/drawing/2014/main" id="{0BAAFE4F-0CA0-6F8F-E10F-2E177A81C5D9}"/>
-              </a:ext>
-            </a:extLst>
-          </p:cNvPr>
-          <p:cNvSpPr/>
-          <p:nvPr/>
-        </p:nvSpPr>
-        <p:spPr>
-          <a:xfrm>
-            <a:off x="1574954" y="1896919"/>
-            <a:ext cx="173990" cy="3877310"/>
-          </a:xfrm>
-          <a:custGeom>
-            <a:avLst/>
-            <a:gdLst/>
-            <a:ahLst/>
-            <a:cxnLst/>
-            <a:rect l="l" t="t" r="r" b="b"/>
-            <a:pathLst>
-              <a:path w="173990" h="3877310">
-                <a:moveTo>
-                  <a:pt x="115824" y="144779"/>
-                </a:moveTo>
-                <a:lnTo>
-                  <a:pt x="57912" y="144779"/>
-                </a:lnTo>
-                <a:lnTo>
-                  <a:pt x="57912" y="3877170"/>
-                </a:lnTo>
-                <a:lnTo>
-                  <a:pt x="115824" y="3877170"/>
-                </a:lnTo>
-                <a:lnTo>
-                  <a:pt x="115824" y="144779"/>
-                </a:lnTo>
-                <a:close/>
-              </a:path>
-              <a:path w="173990" h="3877310">
-                <a:moveTo>
-                  <a:pt x="86868" y="0"/>
-                </a:moveTo>
-                <a:lnTo>
-                  <a:pt x="0" y="173735"/>
-                </a:lnTo>
-                <a:lnTo>
-                  <a:pt x="57912" y="173735"/>
-                </a:lnTo>
-                <a:lnTo>
-                  <a:pt x="57912" y="144779"/>
-                </a:lnTo>
-                <a:lnTo>
-                  <a:pt x="159258" y="144779"/>
-                </a:lnTo>
-                <a:lnTo>
-                  <a:pt x="86868" y="0"/>
-                </a:lnTo>
-                <a:close/>
-              </a:path>
-              <a:path w="173990" h="3877310">
-                <a:moveTo>
-                  <a:pt x="159258" y="144779"/>
-                </a:moveTo>
-                <a:lnTo>
-                  <a:pt x="115824" y="144779"/>
-                </a:lnTo>
-                <a:lnTo>
-                  <a:pt x="115824" y="173735"/>
-                </a:lnTo>
-                <a:lnTo>
-                  <a:pt x="173735" y="173735"/>
-                </a:lnTo>
-                <a:lnTo>
-                  <a:pt x="159258" y="144779"/>
-                </a:lnTo>
-                <a:close/>
-              </a:path>
-            </a:pathLst>
-          </a:custGeom>
-          <a:solidFill>
-            <a:srgbClr val="000000"/>
-          </a:solidFill>
-        </p:spPr>
-        <p:txBody>
-          <a:bodyPr wrap="square" lIns="0" tIns="0" rIns="0" bIns="0" rtlCol="0"/>
-          <a:lstStyle/>
-          <a:p>
-            <a:endParaRPr/>
-          </a:p>
-        </p:txBody>
-      </p:sp>
+          </p:spPr>
+          <p:txBody>
+            <a:bodyPr wrap="square" lIns="0" tIns="0" rIns="0" bIns="0" rtlCol="0"/>
+            <a:lstStyle/>
+            <a:p>
+              <a:endParaRPr/>
+            </a:p>
+          </p:txBody>
+        </p:sp>
+      </p:grpSp>
       <p:pic>
         <p:nvPicPr>
           <p:cNvPr id="47" name="Picture 46">
@@ -10975,7 +11752,7 @@
         </p:blipFill>
         <p:spPr>
           <a:xfrm>
-            <a:off x="7442047" y="2877244"/>
+            <a:off x="7344343" y="3439080"/>
             <a:ext cx="3957423" cy="1103512"/>
           </a:xfrm>
           <a:prstGeom prst="rect">
@@ -10988,6 +11765,174 @@
   <p:clrMapOvr>
     <a:masterClrMapping/>
   </p:clrMapOvr>
+  <p:timing>
+    <p:tnLst>
+      <p:par>
+        <p:cTn id="1" dur="indefinite" restart="never" nodeType="tmRoot">
+          <p:childTnLst>
+            <p:seq concurrent="1" nextAc="seek">
+              <p:cTn id="2" dur="indefinite" nodeType="mainSeq">
+                <p:childTnLst>
+                  <p:par>
+                    <p:cTn id="3" fill="hold">
+                      <p:stCondLst>
+                        <p:cond delay="indefinite"/>
+                      </p:stCondLst>
+                      <p:childTnLst>
+                        <p:par>
+                          <p:cTn id="4" fill="hold">
+                            <p:stCondLst>
+                              <p:cond delay="0"/>
+                            </p:stCondLst>
+                            <p:childTnLst>
+                              <p:par>
+                                <p:cTn id="5" presetID="1" presetClass="entr" presetSubtype="0" fill="hold" nodeType="clickEffect">
+                                  <p:stCondLst>
+                                    <p:cond delay="0"/>
+                                  </p:stCondLst>
+                                  <p:childTnLst>
+                                    <p:set>
+                                      <p:cBhvr>
+                                        <p:cTn id="6" dur="1" fill="hold">
+                                          <p:stCondLst>
+                                            <p:cond delay="0"/>
+                                          </p:stCondLst>
+                                        </p:cTn>
+                                        <p:tgtEl>
+                                          <p:spTgt spid="2"/>
+                                        </p:tgtEl>
+                                        <p:attrNameLst>
+                                          <p:attrName>style.visibility</p:attrName>
+                                        </p:attrNameLst>
+                                      </p:cBhvr>
+                                      <p:to>
+                                        <p:strVal val="visible"/>
+                                      </p:to>
+                                    </p:set>
+                                  </p:childTnLst>
+                                </p:cTn>
+                              </p:par>
+                            </p:childTnLst>
+                          </p:cTn>
+                        </p:par>
+                      </p:childTnLst>
+                    </p:cTn>
+                  </p:par>
+                  <p:par>
+                    <p:cTn id="7" fill="hold">
+                      <p:stCondLst>
+                        <p:cond delay="indefinite"/>
+                      </p:stCondLst>
+                      <p:childTnLst>
+                        <p:par>
+                          <p:cTn id="8" fill="hold">
+                            <p:stCondLst>
+                              <p:cond delay="0"/>
+                            </p:stCondLst>
+                            <p:childTnLst>
+                              <p:par>
+                                <p:cTn id="9" presetID="1" presetClass="entr" presetSubtype="0" fill="hold" grpId="0" nodeType="clickEffect">
+                                  <p:stCondLst>
+                                    <p:cond delay="0"/>
+                                  </p:stCondLst>
+                                  <p:childTnLst>
+                                    <p:set>
+                                      <p:cBhvr>
+                                        <p:cTn id="10" dur="1" fill="hold">
+                                          <p:stCondLst>
+                                            <p:cond delay="0"/>
+                                          </p:stCondLst>
+                                        </p:cTn>
+                                        <p:tgtEl>
+                                          <p:spTgt spid="19"/>
+                                        </p:tgtEl>
+                                        <p:attrNameLst>
+                                          <p:attrName>style.visibility</p:attrName>
+                                        </p:attrNameLst>
+                                      </p:cBhvr>
+                                      <p:to>
+                                        <p:strVal val="visible"/>
+                                      </p:to>
+                                    </p:set>
+                                  </p:childTnLst>
+                                </p:cTn>
+                              </p:par>
+                            </p:childTnLst>
+                          </p:cTn>
+                        </p:par>
+                      </p:childTnLst>
+                    </p:cTn>
+                  </p:par>
+                  <p:par>
+                    <p:cTn id="11" fill="hold">
+                      <p:stCondLst>
+                        <p:cond delay="indefinite"/>
+                      </p:stCondLst>
+                      <p:childTnLst>
+                        <p:par>
+                          <p:cTn id="12" fill="hold">
+                            <p:stCondLst>
+                              <p:cond delay="0"/>
+                            </p:stCondLst>
+                            <p:childTnLst>
+                              <p:par>
+                                <p:cTn id="13" presetID="1" presetClass="entr" presetSubtype="0" fill="hold" nodeType="clickEffect">
+                                  <p:stCondLst>
+                                    <p:cond delay="0"/>
+                                  </p:stCondLst>
+                                  <p:childTnLst>
+                                    <p:set>
+                                      <p:cBhvr>
+                                        <p:cTn id="14" dur="1" fill="hold">
+                                          <p:stCondLst>
+                                            <p:cond delay="0"/>
+                                          </p:stCondLst>
+                                        </p:cTn>
+                                        <p:tgtEl>
+                                          <p:spTgt spid="47"/>
+                                        </p:tgtEl>
+                                        <p:attrNameLst>
+                                          <p:attrName>style.visibility</p:attrName>
+                                        </p:attrNameLst>
+                                      </p:cBhvr>
+                                      <p:to>
+                                        <p:strVal val="visible"/>
+                                      </p:to>
+                                    </p:set>
+                                  </p:childTnLst>
+                                </p:cTn>
+                              </p:par>
+                            </p:childTnLst>
+                          </p:cTn>
+                        </p:par>
+                      </p:childTnLst>
+                    </p:cTn>
+                  </p:par>
+                </p:childTnLst>
+              </p:cTn>
+              <p:prevCondLst>
+                <p:cond evt="onPrev" delay="0">
+                  <p:tgtEl>
+                    <p:sldTgt/>
+                  </p:tgtEl>
+                </p:cond>
+              </p:prevCondLst>
+              <p:nextCondLst>
+                <p:cond evt="onNext" delay="0">
+                  <p:tgtEl>
+                    <p:sldTgt/>
+                  </p:tgtEl>
+                </p:cond>
+              </p:nextCondLst>
+            </p:seq>
+          </p:childTnLst>
+        </p:cTn>
+      </p:par>
+    </p:tnLst>
+    <p:bldLst>
+      <p:bldP spid="19" grpId="0"/>
+    </p:bldLst>
+  </p:timing>
 </p:sld>
 </file>
 
@@ -12521,6 +13466,56 @@
           </a:p>
         </p:txBody>
       </p:sp>
+      <p:sp>
+        <p:nvSpPr>
+          <p:cNvPr id="4" name="TextBox 3">
+            <a:extLst>
+              <a:ext uri="{FF2B5EF4-FFF2-40B4-BE49-F238E27FC236}">
+                <a16:creationId xmlns:a16="http://schemas.microsoft.com/office/drawing/2014/main" id="{2004462D-68F9-8C5A-C546-ED414BC8F3E1}"/>
+              </a:ext>
+            </a:extLst>
+          </p:cNvPr>
+          <p:cNvSpPr txBox="1"/>
+          <p:nvPr/>
+        </p:nvSpPr>
+        <p:spPr>
+          <a:xfrm>
+            <a:off x="4324865" y="6279823"/>
+            <a:ext cx="7425270" cy="461665"/>
+          </a:xfrm>
+          <a:prstGeom prst="rect">
+            <a:avLst/>
+          </a:prstGeom>
+        </p:spPr>
+        <p:style>
+          <a:lnRef idx="2">
+            <a:schemeClr val="accent3">
+              <a:shade val="15000"/>
+            </a:schemeClr>
+          </a:lnRef>
+          <a:fillRef idx="1">
+            <a:schemeClr val="accent3"/>
+          </a:fillRef>
+          <a:effectRef idx="0">
+            <a:schemeClr val="accent3"/>
+          </a:effectRef>
+          <a:fontRef idx="minor">
+            <a:schemeClr val="lt1"/>
+          </a:fontRef>
+        </p:style>
+        <p:txBody>
+          <a:bodyPr wrap="square" rtlCol="0">
+            <a:spAutoFit/>
+          </a:bodyPr>
+          <a:lstStyle/>
+          <a:p>
+            <a:r>
+              <a:rPr lang="en-US" sz="2400" dirty="0"/>
+              <a:t>Discussion: Pros and Cons of Gradient Descent?</a:t>
+            </a:r>
+          </a:p>
+        </p:txBody>
+      </p:sp>
     </p:spTree>
     <p:extLst>
       <p:ext uri="{BB962C8B-B14F-4D97-AF65-F5344CB8AC3E}">
@@ -12531,6 +13526,84 @@
   <p:clrMapOvr>
     <a:masterClrMapping/>
   </p:clrMapOvr>
+  <p:timing>
+    <p:tnLst>
+      <p:par>
+        <p:cTn id="1" dur="indefinite" restart="never" nodeType="tmRoot">
+          <p:childTnLst>
+            <p:seq concurrent="1" nextAc="seek">
+              <p:cTn id="2" dur="indefinite" nodeType="mainSeq">
+                <p:childTnLst>
+                  <p:par>
+                    <p:cTn id="3" fill="hold">
+                      <p:stCondLst>
+                        <p:cond delay="indefinite"/>
+                      </p:stCondLst>
+                      <p:childTnLst>
+                        <p:par>
+                          <p:cTn id="4" fill="hold">
+                            <p:stCondLst>
+                              <p:cond delay="0"/>
+                            </p:stCondLst>
+                            <p:childTnLst>
+                              <p:par>
+                                <p:cTn id="5" presetID="1" presetClass="entr" presetSubtype="0" fill="hold" grpId="0" nodeType="clickEffect">
+                                  <p:stCondLst>
+                                    <p:cond delay="0"/>
+                                  </p:stCondLst>
+                                  <p:childTnLst>
+                                    <p:set>
+                                      <p:cBhvr>
+                                        <p:cTn id="6" dur="1" fill="hold">
+                                          <p:stCondLst>
+                                            <p:cond delay="0"/>
+                                          </p:stCondLst>
+                                        </p:cTn>
+                                        <p:tgtEl>
+                                          <p:spTgt spid="4"/>
+                                        </p:tgtEl>
+                                        <p:attrNameLst>
+                                          <p:attrName>style.visibility</p:attrName>
+                                        </p:attrNameLst>
+                                      </p:cBhvr>
+                                      <p:to>
+                                        <p:strVal val="visible"/>
+                                      </p:to>
+                                    </p:set>
+                                  </p:childTnLst>
+                                </p:cTn>
+                              </p:par>
+                            </p:childTnLst>
+                          </p:cTn>
+                        </p:par>
+                      </p:childTnLst>
+                    </p:cTn>
+                  </p:par>
+                </p:childTnLst>
+              </p:cTn>
+              <p:prevCondLst>
+                <p:cond evt="onPrev" delay="0">
+                  <p:tgtEl>
+                    <p:sldTgt/>
+                  </p:tgtEl>
+                </p:cond>
+              </p:prevCondLst>
+              <p:nextCondLst>
+                <p:cond evt="onNext" delay="0">
+                  <p:tgtEl>
+                    <p:sldTgt/>
+                  </p:tgtEl>
+                </p:cond>
+              </p:nextCondLst>
+            </p:seq>
+          </p:childTnLst>
+        </p:cTn>
+      </p:par>
+    </p:tnLst>
+    <p:bldLst>
+      <p:bldP spid="4" grpId="0" animBg="1"/>
+    </p:bldLst>
+  </p:timing>
 </p:sld>
 </file>
 

--- a/slides/pptx/lecture02_training.pptx
+++ b/slides/pptx/lecture02_training.pptx
@@ -3504,8 +3504,13 @@
           <a:lstStyle/>
           <a:p>
             <a:r>
-              <a:rPr lang="en-US" dirty="0"/>
-              <a:t>Part two – More on Gradient descent</a:t>
+              <a:rPr sz="1300" b="1" i="0">
+                <a:solidFill>
+                  <a:srgbClr val="8A9099"/>
+                </a:solidFill>
+                <a:latin typeface="Menlo"/>
+              </a:rPr>
+              <a:t>PART TWO · WHERE GRADIENT DESCENT STRUGGLES</a:t>
             </a:r>
           </a:p>
         </p:txBody>
@@ -7977,8 +7982,13 @@
           <a:lstStyle/>
           <a:p>
             <a:r>
-              <a:rPr lang="en-US" dirty="0"/>
-              <a:t>Deep learning training</a:t>
+              <a:rPr sz="1300" b="1" i="0">
+                <a:solidFill>
+                  <a:srgbClr val="8A9099"/>
+                </a:solidFill>
+                <a:latin typeface="Menlo"/>
+              </a:rPr>
+              <a:t>TODAY · TRY AND ADJUST</a:t>
             </a:r>
           </a:p>
         </p:txBody>
@@ -13912,25 +13922,14 @@
               <a:defRPr/>
             </a:pPr>
             <a:r>
-              <a:rPr kumimoji="0" lang="en-US" sz="1300" b="1" i="0" u="none" strike="noStrike" kern="1200" cap="none" spc="0" normalizeH="0" baseline="0" noProof="0" dirty="0">
-                <a:ln>
-                  <a:noFill/>
-                </a:ln>
+              <a:rPr sz="1300" b="1" i="0">
                 <a:solidFill>
                   <a:srgbClr val="8A9099"/>
                 </a:solidFill>
-                <a:effectLst/>
-                <a:uLnTx/>
-                <a:uFillTx/>
                 <a:latin typeface="Menlo"/>
-                <a:ea typeface="+mn-ea"/>
-                <a:cs typeface="+mn-cs"/>
-              </a:rPr>
-              <a:t>PART TWO · More on Gradient Descent</a:t>
-            </a:r>
-          </a:p>
-          <a:p>
-            <a:endParaRPr lang="en-US" dirty="0"/>
+              </a:rPr>
+              <a:t>PART TWO · GRADIENT DESCENT IN 2D</a:t>
+            </a:r>
           </a:p>
         </p:txBody>
       </p:sp>

--- a/slides/pptx/lecture02_training.pptx
+++ b/slides/pptx/lecture02_training.pptx
@@ -150,6 +150,34 @@
 </p:presentation>
 </file>
 
+<file path=ppt/ink/ink1.xml><?xml version="1.0" encoding="utf-8"?>
+<inkml:ink xmlns:inkml="http://www.w3.org/2003/InkML">
+  <inkml:definitions>
+    <inkml:context xml:id="ctx0">
+      <inkml:inkSource xml:id="inkSrc0">
+        <inkml:traceFormat>
+          <inkml:channel name="X" type="integer" min="-2.14748E9" max="2.14748E9" units="cm"/>
+          <inkml:channel name="Y" type="integer" min="-2.14748E9" max="2.14748E9" units="cm"/>
+          <inkml:channel name="F" type="integer" max="32767" units="dev"/>
+        </inkml:traceFormat>
+        <inkml:channelProperties>
+          <inkml:channelProperty channel="X" name="resolution" value="1000" units="1/cm"/>
+          <inkml:channelProperty channel="Y" name="resolution" value="1000" units="1/cm"/>
+          <inkml:channelProperty channel="F" name="resolution" value="0" units="1/dev"/>
+        </inkml:channelProperties>
+      </inkml:inkSource>
+      <inkml:timestamp xml:id="ts0" timeString="2026-09-25T01:15:14.634"/>
+    </inkml:context>
+    <inkml:brush xml:id="br0">
+      <inkml:brushProperty name="width" value="0.05" units="cm"/>
+      <inkml:brushProperty name="height" value="0.05" units="cm"/>
+      <inkml:brushProperty name="color" value="#E71225"/>
+    </inkml:brush>
+  </inkml:definitions>
+  <inkml:trace contextRef="#ctx0" brushRef="#br0">1 1152 24575,'9'20'0,"0"1"0,5-2 0,8 23 0,1-7 0,26 43 0,-13-23 0,-8-11 0,1 1 0,11 24 0,-8-13 0,2 3 0,-20-35 0,22 33 0,-21-32 0,13 8 0,-16-15 0,0-9 0,-1 2 0,1-7 0,0 3 0,9-6 0,-7 3 0,12-4 0,-3 0 0,-2 0 0,15-13 0,-6-4 0,23-35 0,-17 14 0,3-6 0,8-13 0,2-4 0,7-5 0,3-2 0,1-2 0,-2 3 0,-15 17 0,0 1 0,14-15 0,1 0 0,-9 13 0,0-2 0,-5 4 0,3-3 0,0 0 0,23-19 0,-1 2 0,-10 5 0,3-1 0,-4 9 0,2-1 0,-5 5 0,-9 5 0,-2 2 0,23-19 0,-6 7 0,-23 19 0,-13 10 0,-12 17 0,-8 3 0,3-4 0,-1 4 0,1-4 0,0 4 0,-4 0 0,3 0 0,-3 1 0,4-1 0,0 0 0,0-4 0,0 3 0,-4-2 0,-1 7 0,-3 0 0</inkml:trace>
+</inkml:ink>
+</file>
+
 <file path=ppt/notesMasters/notesMaster1.xml><?xml version="1.0" encoding="utf-8"?>
 <p:notesMaster xmlns:a="http://schemas.openxmlformats.org/drawingml/2006/main" xmlns:r="http://schemas.openxmlformats.org/officeDocument/2006/relationships" xmlns:p="http://schemas.openxmlformats.org/presentationml/2006/main">
   <p:cSld>
@@ -1132,11 +1160,20 @@
           <a:lstStyle/>
           <a:p>
             <a:r>
-              <a:t>Two minutes. Rebuild the bridge before adding anything new. This is the Lecture 1 network — same two inputs, one hidden layer, one output — except every weight now reads "w = ?". That is the honest starting state of any real network: weights are initialised at random, so the very first prediction is garbage. Learning is nothing more than repeatedly adjusting those numbers until the predictions stop being garbage. Keep the mantra alive: multiply, add, bend — now we add a fourth verb, "correct."</a:t>
-            </a:r>
-          </a:p>
-          <a:p>
-            <a:endParaRPr/>
+              <a:rPr dirty="0"/>
+              <a:t>Two minutes. Rebuild the bridge before adding anything new. This is the Lecture 1 network — same two inputs, one hidden layer, one output — except every weight now reads "w = ?". That is the honest starting state of any real network: weights are </a:t>
+            </a:r>
+            <a:r>
+              <a:rPr dirty="0" err="1"/>
+              <a:t>initialised</a:t>
+            </a:r>
+            <a:r>
+              <a:rPr dirty="0"/>
+              <a:t> at random, so the very first prediction is garbage. Learning is nothing more than repeatedly adjusting those numbers until the predictions stop being garbage. Keep the mantra alive: multiply, add, bend — now we add a fourth verb, "correct."</a:t>
+            </a:r>
+          </a:p>
+          <a:p>
+            <a:endParaRPr dirty="0"/>
           </a:p>
         </p:txBody>
       </p:sp>
@@ -1424,11 +1461,28 @@
           <a:lstStyle/>
           <a:p>
             <a:r>
-              <a:t>Give them the map before the details. Walk the loop once, slowly: (1) push an input forward and get a guess; (2) measure how wrong the guess is — that number is the loss; (3) send the blame backward to every weight — that is backpropagation; (4) nudge each weight a little in the improving direction — that is the step. Then repeat, thousands of times. A homely twin to keep in your pocket: sighting in a catapult with no physics — you fire, see where the stone lands (the miss = loss), turn the power dial the right way (the gradient), and fire again, closing on the target. A network does exactly this with millions of dials. These four boxes reappear as five lines of real PyTorch; you will recognise every one.</a:t>
-            </a:r>
-          </a:p>
-          <a:p>
-            <a:endParaRPr/>
+              <a:rPr dirty="0"/>
+              <a:t>Give them the map before the details. Walk the loop once, slowly: (1) push an input forward and get a guess; (2) measure how wrong the guess is — that number is the loss; (3) send the blame backward to every weight — that is backpropagation; (4) nudge each weight a little in the improving direction — that is the step. Then repeat, thousands of times. A homely twin to keep in your pocket: sighting in a catapult with no physics — you fire, see where the stone lands (the miss = loss), turn the power dial the right way (the gradient), and fire again, closing on the target. A network does exactly this with millions of dials. These four boxes reappear as five lines of real </a:t>
+            </a:r>
+            <a:r>
+              <a:rPr dirty="0" err="1"/>
+              <a:t>PyTorch</a:t>
+            </a:r>
+            <a:r>
+              <a:rPr dirty="0"/>
+              <a:t>; you will </a:t>
+            </a:r>
+            <a:r>
+              <a:rPr dirty="0" err="1"/>
+              <a:t>recognise</a:t>
+            </a:r>
+            <a:r>
+              <a:rPr dirty="0"/>
+              <a:t> every one.</a:t>
+            </a:r>
+          </a:p>
+          <a:p>
+            <a:endParaRPr dirty="0"/>
           </a:p>
         </p:txBody>
       </p:sp>
@@ -1497,11 +1551,20 @@
           <a:lstStyle/>
           <a:p>
             <a:r>
-              <a:t>Keep this to ~four minutes. Loss scores how far the guesses are from the truth, collapsed to one number. Use MSE because it is the most intuitive — literally the average squared gap (each red bar is one error). Two reasons for the square, both on the slide: it kills the sign (a miss of −3 and +3 are equally bad), and it disproportionately penalises large misses, so the network cares most about its worst mistakes. Do NOT introduce cross-entropy — that is Lecture 4, for classification; one sentence so nobody thinks MSE is the only loss. Land it: loss is the single dial we turn down for the rest of the hour.</a:t>
-            </a:r>
-          </a:p>
-          <a:p>
-            <a:endParaRPr/>
+              <a:rPr dirty="0"/>
+              <a:t>Keep this to ~four minutes. Loss scores how far the guesses are from the truth, collapsed to one number. Use MSE because it is the most intuitive — literally the average squared gap (each red bar is one error). Two reasons for the square, both on the slide: it kills the sign (a miss of −3 and +3 are equally bad), and it disproportionately </a:t>
+            </a:r>
+            <a:r>
+              <a:rPr dirty="0" err="1"/>
+              <a:t>penalises</a:t>
+            </a:r>
+            <a:r>
+              <a:rPr dirty="0"/>
+              <a:t> large misses, so the network cares most about its worst mistakes. Do NOT introduce cross-entropy — that is Lecture 4, for classification; one sentence so nobody thinks MSE is the only loss. Land it: loss is the single dial we turn down for the rest of the hour.</a:t>
+            </a:r>
+          </a:p>
+          <a:p>
+            <a:endParaRPr dirty="0"/>
           </a:p>
         </p:txBody>
       </p:sp>
@@ -1763,11 +1826,12 @@
           <a:lstStyle/>
           <a:p>
             <a:r>
+              <a:rPr dirty="0"/>
               <a:t>I-DO. The learning rate is the multiplier on the slope — how big a step we take. Walk the three bowls left to right. Too small: steps so tiny the ball crawls; training wastes hours and can settle into a shallow dip and never reach the true bottom. Too big: each step overshoots and lands higher up the far wall; the loss bounces and can diverge to infinity. Just right: brisk, stable steps into the valley. Tell them plainly this is the first knob they reach for in every lab and real project — and the next slides show how to read the loss curve to tell which case you are in.</a:t>
             </a:r>
           </a:p>
           <a:p>
-            <a:endParaRPr/>
+            <a:endParaRPr dirty="0"/>
           </a:p>
         </p:txBody>
       </p:sp>
@@ -3989,6 +4053,79 @@
                 <a:latin typeface="Avenir Next"/>
               </a:rPr>
               <a:t>Your turn → Quiz 2, Q3. For each curve write the diagnosis and the one change you would make (use the word banks). Watch out: (a) and (d) are NOT the same problem. 2 minutes — worked answer in the notes.</a:t>
+            </a:r>
+          </a:p>
+        </p:txBody>
+      </p:sp>
+      <p:sp>
+        <p:nvSpPr>
+          <p:cNvPr id="7" name="TextBox 6"/>
+          <p:cNvSpPr txBox="1"/>
+          <p:nvPr/>
+        </p:nvSpPr>
+        <p:spPr>
+          <a:xfrm>
+            <a:off x="548640" y="6044184"/>
+            <a:ext cx="10515600" cy="753816"/>
+          </a:xfrm>
+          <a:prstGeom prst="rect">
+            <a:avLst/>
+          </a:prstGeom>
+          <a:noFill/>
+        </p:spPr>
+        <p:txBody>
+          <a:bodyPr wrap="square" lIns="45720" tIns="27432" rIns="45720" bIns="27432" anchor="t">
+            <a:spAutoFit/>
+          </a:bodyPr>
+          <a:lstStyle/>
+          <a:p>
+            <a:pPr algn="l">
+              <a:spcAft>
+                <a:spcPts val="200"/>
+              </a:spcAft>
+            </a:pPr>
+            <a:r>
+              <a:rPr sz="1200" b="1">
+                <a:solidFill>
+                  <a:srgbClr val="0E7C7B"/>
+                </a:solidFill>
+                <a:latin typeface="Avenir Next"/>
+              </a:rPr>
+              <a:t>Diagnosis bank:</a:t>
+            </a:r>
+            <a:r>
+              <a:rPr sz="1200" b="0">
+                <a:solidFill>
+                  <a:srgbClr val="3D444C"/>
+                </a:solidFill>
+                <a:latin typeface="Avenir Next"/>
+              </a:rPr>
+              <a:t>  far too high (diverging)  ·  a bit too high (noisy but converging)  ·  too low  ·  just right</a:t>
+            </a:r>
+          </a:p>
+          <a:p>
+            <a:pPr algn="l">
+              <a:spcAft>
+                <a:spcPts val="200"/>
+              </a:spcAft>
+            </a:pPr>
+            <a:r>
+              <a:rPr sz="1200" b="1">
+                <a:solidFill>
+                  <a:srgbClr val="0E7C7B"/>
+                </a:solidFill>
+                <a:latin typeface="Avenir Next"/>
+              </a:rPr>
+              <a:t>Fix bank:</a:t>
+            </a:r>
+            <a:r>
+              <a:rPr sz="1200" b="0">
+                <a:solidFill>
+                  <a:srgbClr val="3D444C"/>
+                </a:solidFill>
+                <a:latin typeface="Avenir Next"/>
+              </a:rPr>
+              <a:t>  lower the rate a lot  ·  lower it a little  ·  raise it  ·  keep it (train longer)</a:t>
             </a:r>
           </a:p>
         </p:txBody>
@@ -8032,13 +8169,15 @@
               </a:ext>
             </a:extLst>
           </p:cNvPr>
-          <p:cNvCxnSpPr/>
+          <p:cNvCxnSpPr>
+            <a:cxnSpLocks/>
+          </p:cNvCxnSpPr>
           <p:nvPr/>
         </p:nvCxnSpPr>
         <p:spPr>
           <a:xfrm flipV="1">
-            <a:off x="3101546" y="4040659"/>
-            <a:ext cx="2866768" cy="1013255"/>
+            <a:off x="3558746" y="4040659"/>
+            <a:ext cx="2409568" cy="1079982"/>
           </a:xfrm>
           <a:prstGeom prst="straightConnector1">
             <a:avLst/>
@@ -8079,7 +8218,7 @@
         <p:spPr>
           <a:xfrm flipH="1" flipV="1">
             <a:off x="2998381" y="3187024"/>
-            <a:ext cx="103165" cy="1866890"/>
+            <a:ext cx="346917" cy="1933617"/>
           </a:xfrm>
           <a:prstGeom prst="straightConnector1">
             <a:avLst/>
@@ -8123,8 +8262,21 @@
           <a:prstGeom prst="rect">
             <a:avLst/>
           </a:prstGeom>
-          <a:noFill/>
-        </p:spPr>
+        </p:spPr>
+        <p:style>
+          <a:lnRef idx="1">
+            <a:schemeClr val="accent3"/>
+          </a:lnRef>
+          <a:fillRef idx="2">
+            <a:schemeClr val="accent3"/>
+          </a:fillRef>
+          <a:effectRef idx="1">
+            <a:schemeClr val="accent3"/>
+          </a:effectRef>
+          <a:fontRef idx="minor">
+            <a:schemeClr val="dk1"/>
+          </a:fontRef>
+        </p:style>
         <p:txBody>
           <a:bodyPr wrap="none" rtlCol="0">
             <a:spAutoFit/>
@@ -8352,7 +8504,7 @@
                             </p:stCondLst>
                             <p:childTnLst>
                               <p:par>
-                                <p:cTn id="5" presetID="1" presetClass="entr" presetSubtype="0" fill="hold" grpId="0" nodeType="clickEffect">
+                                <p:cTn id="5" presetID="1" presetClass="entr" presetSubtype="0" fill="hold" nodeType="clickEffect">
                                   <p:stCondLst>
                                     <p:cond delay="0"/>
                                   </p:stCondLst>
@@ -8365,7 +8517,88 @@
                                           </p:stCondLst>
                                         </p:cTn>
                                         <p:tgtEl>
-                                          <p:spTgt spid="17"/>
+                                          <p:spTgt spid="5"/>
+                                        </p:tgtEl>
+                                        <p:attrNameLst>
+                                          <p:attrName>style.visibility</p:attrName>
+                                        </p:attrNameLst>
+                                      </p:cBhvr>
+                                      <p:to>
+                                        <p:strVal val="visible"/>
+                                      </p:to>
+                                    </p:set>
+                                  </p:childTnLst>
+                                </p:cTn>
+                              </p:par>
+                              <p:par>
+                                <p:cTn id="7" presetID="1" presetClass="entr" presetSubtype="0" fill="hold" nodeType="withEffect">
+                                  <p:stCondLst>
+                                    <p:cond delay="0"/>
+                                  </p:stCondLst>
+                                  <p:childTnLst>
+                                    <p:set>
+                                      <p:cBhvr>
+                                        <p:cTn id="8" dur="1" fill="hold">
+                                          <p:stCondLst>
+                                            <p:cond delay="0"/>
+                                          </p:stCondLst>
+                                        </p:cTn>
+                                        <p:tgtEl>
+                                          <p:spTgt spid="15"/>
+                                        </p:tgtEl>
+                                        <p:attrNameLst>
+                                          <p:attrName>style.visibility</p:attrName>
+                                        </p:attrNameLst>
+                                      </p:cBhvr>
+                                      <p:to>
+                                        <p:strVal val="visible"/>
+                                      </p:to>
+                                    </p:set>
+                                  </p:childTnLst>
+                                </p:cTn>
+                              </p:par>
+                              <p:par>
+                                <p:cTn id="9" presetID="1" presetClass="entr" presetSubtype="0" fill="hold" grpId="0" nodeType="withEffect">
+                                  <p:stCondLst>
+                                    <p:cond delay="0"/>
+                                  </p:stCondLst>
+                                  <p:childTnLst>
+                                    <p:set>
+                                      <p:cBhvr>
+                                        <p:cTn id="10" dur="1" fill="hold">
+                                          <p:stCondLst>
+                                            <p:cond delay="0"/>
+                                          </p:stCondLst>
+                                        </p:cTn>
+                                        <p:tgtEl>
+                                          <p:spTgt spid="18"/>
+                                        </p:tgtEl>
+                                        <p:attrNameLst>
+                                          <p:attrName>style.visibility</p:attrName>
+                                        </p:attrNameLst>
+                                      </p:cBhvr>
+                                      <p:to>
+                                        <p:strVal val="visible"/>
+                                      </p:to>
+                                    </p:set>
+                                  </p:childTnLst>
+                                </p:cTn>
+                              </p:par>
+                              <p:par>
+                                <p:cTn id="11" presetID="1" presetClass="entr" presetSubtype="0" fill="hold" grpId="0" nodeType="withEffect">
+                                  <p:stCondLst>
+                                    <p:cond delay="0"/>
+                                  </p:stCondLst>
+                                  <p:childTnLst>
+                                    <p:set>
+                                      <p:cBhvr>
+                                        <p:cTn id="12" dur="1" fill="hold">
+                                          <p:stCondLst>
+                                            <p:cond delay="0"/>
+                                          </p:stCondLst>
+                                        </p:cTn>
+                                        <p:tgtEl>
+                                          <p:spTgt spid="16"/>
                                         </p:tgtEl>
                                         <p:attrNameLst>
                                           <p:attrName>style.visibility</p:attrName>
@@ -8385,32 +8618,32 @@
                     </p:cTn>
                   </p:par>
                   <p:par>
-                    <p:cTn id="7" fill="hold">
+                    <p:cTn id="13" fill="hold">
                       <p:stCondLst>
                         <p:cond delay="indefinite"/>
                       </p:stCondLst>
                       <p:childTnLst>
                         <p:par>
-                          <p:cTn id="8" fill="hold">
+                          <p:cTn id="14" fill="hold">
                             <p:stCondLst>
                               <p:cond delay="0"/>
                             </p:stCondLst>
                             <p:childTnLst>
                               <p:par>
-                                <p:cTn id="9" presetID="1" presetClass="entr" presetSubtype="0" fill="hold" nodeType="clickEffect">
+                                <p:cTn id="15" presetID="1" presetClass="entr" presetSubtype="0" fill="hold" nodeType="clickEffect">
                                   <p:stCondLst>
                                     <p:cond delay="0"/>
                                   </p:stCondLst>
                                   <p:childTnLst>
                                     <p:set>
                                       <p:cBhvr>
-                                        <p:cTn id="10" dur="1" fill="hold">
+                                        <p:cTn id="16" dur="1" fill="hold">
                                           <p:stCondLst>
                                             <p:cond delay="0"/>
                                           </p:stCondLst>
                                         </p:cTn>
                                         <p:tgtEl>
-                                          <p:spTgt spid="5"/>
+                                          <p:spTgt spid="7"/>
                                         </p:tgtEl>
                                         <p:attrNameLst>
                                           <p:attrName>style.visibility</p:attrName>
@@ -8430,26 +8663,26 @@
                     </p:cTn>
                   </p:par>
                   <p:par>
-                    <p:cTn id="11" fill="hold">
+                    <p:cTn id="17" fill="hold">
                       <p:stCondLst>
                         <p:cond delay="indefinite"/>
                       </p:stCondLst>
                       <p:childTnLst>
                         <p:par>
-                          <p:cTn id="12" fill="hold">
+                          <p:cTn id="18" fill="hold">
                             <p:stCondLst>
                               <p:cond delay="0"/>
                             </p:stCondLst>
                             <p:childTnLst>
                               <p:par>
-                                <p:cTn id="13" presetID="1" presetClass="entr" presetSubtype="0" fill="hold" nodeType="clickEffect">
+                                <p:cTn id="19" presetID="1" presetClass="entr" presetSubtype="0" fill="hold" nodeType="clickEffect">
                                   <p:stCondLst>
                                     <p:cond delay="0"/>
                                   </p:stCondLst>
                                   <p:childTnLst>
                                     <p:set>
                                       <p:cBhvr>
-                                        <p:cTn id="14" dur="1" fill="hold">
+                                        <p:cTn id="20" dur="1" fill="hold">
                                           <p:stCondLst>
                                             <p:cond delay="0"/>
                                           </p:stCondLst>
@@ -8469,14 +8702,14 @@
                                 </p:cTn>
                               </p:par>
                               <p:par>
-                                <p:cTn id="15" presetID="1" presetClass="entr" presetSubtype="0" fill="hold" nodeType="withEffect">
+                                <p:cTn id="21" presetID="1" presetClass="entr" presetSubtype="0" fill="hold" nodeType="withEffect">
                                   <p:stCondLst>
                                     <p:cond delay="0"/>
                                   </p:stCondLst>
                                   <p:childTnLst>
                                     <p:set>
                                       <p:cBhvr>
-                                        <p:cTn id="16" dur="1" fill="hold">
+                                        <p:cTn id="22" dur="1" fill="hold">
                                           <p:stCondLst>
                                             <p:cond delay="0"/>
                                           </p:stCondLst>
@@ -8496,20 +8729,65 @@
                                 </p:cTn>
                               </p:par>
                               <p:par>
-                                <p:cTn id="17" presetID="1" presetClass="entr" presetSubtype="0" fill="hold" nodeType="withEffect">
+                                <p:cTn id="23" presetID="1" presetClass="entr" presetSubtype="0" fill="hold" grpId="0" nodeType="withEffect">
                                   <p:stCondLst>
                                     <p:cond delay="0"/>
                                   </p:stCondLst>
                                   <p:childTnLst>
                                     <p:set>
                                       <p:cBhvr>
-                                        <p:cTn id="18" dur="1" fill="hold">
+                                        <p:cTn id="24" dur="1" fill="hold">
                                           <p:stCondLst>
                                             <p:cond delay="0"/>
                                           </p:stCondLst>
                                         </p:cTn>
                                         <p:tgtEl>
-                                          <p:spTgt spid="7"/>
+                                          <p:spTgt spid="13"/>
+                                        </p:tgtEl>
+                                        <p:attrNameLst>
+                                          <p:attrName>style.visibility</p:attrName>
+                                        </p:attrNameLst>
+                                      </p:cBhvr>
+                                      <p:to>
+                                        <p:strVal val="visible"/>
+                                      </p:to>
+                                    </p:set>
+                                  </p:childTnLst>
+                                </p:cTn>
+                              </p:par>
+                            </p:childTnLst>
+                          </p:cTn>
+                        </p:par>
+                      </p:childTnLst>
+                    </p:cTn>
+                  </p:par>
+                  <p:par>
+                    <p:cTn id="25" fill="hold">
+                      <p:stCondLst>
+                        <p:cond delay="indefinite"/>
+                      </p:stCondLst>
+                      <p:childTnLst>
+                        <p:par>
+                          <p:cTn id="26" fill="hold">
+                            <p:stCondLst>
+                              <p:cond delay="0"/>
+                            </p:stCondLst>
+                            <p:childTnLst>
+                              <p:par>
+                                <p:cTn id="27" presetID="1" presetClass="entr" presetSubtype="0" fill="hold" grpId="0" nodeType="clickEffect">
+                                  <p:stCondLst>
+                                    <p:cond delay="0"/>
+                                  </p:stCondLst>
+                                  <p:childTnLst>
+                                    <p:set>
+                                      <p:cBhvr>
+                                        <p:cTn id="28" dur="1" fill="hold">
+                                          <p:stCondLst>
+                                            <p:cond delay="0"/>
+                                          </p:stCondLst>
+                                        </p:cTn>
+                                        <p:tgtEl>
+                                          <p:spTgt spid="17"/>
                                         </p:tgtEl>
                                         <p:attrNameLst>
                                           <p:attrName>style.visibility</p:attrName>
@@ -8550,7 +8828,10 @@
       </p:par>
     </p:tnLst>
     <p:bldLst>
+      <p:bldP spid="13" grpId="0" animBg="1"/>
+      <p:bldP spid="16" grpId="0"/>
       <p:bldP spid="17" grpId="0" animBg="1"/>
+      <p:bldP spid="18" grpId="0" animBg="1"/>
     </p:bldLst>
   </p:timing>
 </p:sld>
@@ -9778,11 +10059,257 @@
           </a:fontRef>
         </p:style>
       </p:cxnSp>
+      <mc:AlternateContent xmlns:mc="http://schemas.openxmlformats.org/markup-compatibility/2006">
+        <mc:Choice xmlns:p14="http://schemas.microsoft.com/office/powerpoint/2010/main" Requires="p14">
+          <p:contentPart p14:bwMode="auto" r:id="rId5">
+            <p14:nvContentPartPr>
+              <p14:cNvPr id="11" name="Ink 10">
+                <a:extLst>
+                  <a:ext uri="{FF2B5EF4-FFF2-40B4-BE49-F238E27FC236}">
+                    <a16:creationId xmlns:a16="http://schemas.microsoft.com/office/drawing/2014/main" id="{DFC817E5-4D72-1DA9-F665-C6733936B85E}"/>
+                  </a:ext>
+                </a:extLst>
+              </p14:cNvPr>
+              <p14:cNvContentPartPr/>
+              <p14:nvPr/>
+            </p14:nvContentPartPr>
+            <p14:xfrm>
+              <a:off x="1367494" y="1664971"/>
+              <a:ext cx="849960" cy="680040"/>
+            </p14:xfrm>
+          </p:contentPart>
+        </mc:Choice>
+        <mc:Fallback>
+          <p:pic>
+            <p:nvPicPr>
+              <p:cNvPr id="11" name="Ink 10">
+                <a:extLst>
+                  <a:ext uri="{FF2B5EF4-FFF2-40B4-BE49-F238E27FC236}">
+                    <a16:creationId xmlns:a16="http://schemas.microsoft.com/office/drawing/2014/main" id="{DFC817E5-4D72-1DA9-F665-C6733936B85E}"/>
+                  </a:ext>
+                </a:extLst>
+              </p:cNvPr>
+              <p:cNvPicPr/>
+              <p:nvPr/>
+            </p:nvPicPr>
+            <p:blipFill>
+              <a:blip r:embed="rId6"/>
+              <a:stretch>
+                <a:fillRect/>
+              </a:stretch>
+            </p:blipFill>
+            <p:spPr>
+              <a:xfrm>
+                <a:off x="1358854" y="1655971"/>
+                <a:ext cx="867600" cy="697680"/>
+              </a:xfrm>
+              <a:prstGeom prst="rect">
+                <a:avLst/>
+              </a:prstGeom>
+            </p:spPr>
+          </p:pic>
+        </mc:Fallback>
+      </mc:AlternateContent>
     </p:spTree>
   </p:cSld>
   <p:clrMapOvr>
     <a:masterClrMapping/>
   </p:clrMapOvr>
+  <p:timing>
+    <p:tnLst>
+      <p:par>
+        <p:cTn id="1" dur="indefinite" restart="never" nodeType="tmRoot">
+          <p:childTnLst>
+            <p:seq concurrent="1" nextAc="seek">
+              <p:cTn id="2" dur="indefinite" nodeType="mainSeq">
+                <p:childTnLst>
+                  <p:par>
+                    <p:cTn id="3" fill="hold">
+                      <p:stCondLst>
+                        <p:cond delay="indefinite"/>
+                      </p:stCondLst>
+                      <p:childTnLst>
+                        <p:par>
+                          <p:cTn id="4" fill="hold">
+                            <p:stCondLst>
+                              <p:cond delay="0"/>
+                            </p:stCondLst>
+                            <p:childTnLst>
+                              <p:par>
+                                <p:cTn id="5" presetID="1" presetClass="entr" presetSubtype="0" fill="hold" nodeType="clickEffect">
+                                  <p:stCondLst>
+                                    <p:cond delay="0"/>
+                                  </p:stCondLst>
+                                  <p:childTnLst>
+                                    <p:set>
+                                      <p:cBhvr>
+                                        <p:cTn id="6" dur="1" fill="hold">
+                                          <p:stCondLst>
+                                            <p:cond delay="0"/>
+                                          </p:stCondLst>
+                                        </p:cTn>
+                                        <p:tgtEl>
+                                          <p:spTgt spid="11"/>
+                                        </p:tgtEl>
+                                        <p:attrNameLst>
+                                          <p:attrName>style.visibility</p:attrName>
+                                        </p:attrNameLst>
+                                      </p:cBhvr>
+                                      <p:to>
+                                        <p:strVal val="visible"/>
+                                      </p:to>
+                                    </p:set>
+                                  </p:childTnLst>
+                                </p:cTn>
+                              </p:par>
+                            </p:childTnLst>
+                          </p:cTn>
+                        </p:par>
+                      </p:childTnLst>
+                    </p:cTn>
+                  </p:par>
+                  <p:par>
+                    <p:cTn id="7" fill="hold">
+                      <p:stCondLst>
+                        <p:cond delay="indefinite"/>
+                      </p:stCondLst>
+                      <p:childTnLst>
+                        <p:par>
+                          <p:cTn id="8" fill="hold">
+                            <p:stCondLst>
+                              <p:cond delay="0"/>
+                            </p:stCondLst>
+                            <p:childTnLst>
+                              <p:par>
+                                <p:cTn id="9" presetID="1" presetClass="entr" presetSubtype="0" fill="hold" nodeType="clickEffect">
+                                  <p:stCondLst>
+                                    <p:cond delay="0"/>
+                                  </p:stCondLst>
+                                  <p:childTnLst>
+                                    <p:set>
+                                      <p:cBhvr>
+                                        <p:cTn id="10" dur="1" fill="hold">
+                                          <p:stCondLst>
+                                            <p:cond delay="0"/>
+                                          </p:stCondLst>
+                                        </p:cTn>
+                                        <p:tgtEl>
+                                          <p:spTgt spid="9"/>
+                                        </p:tgtEl>
+                                        <p:attrNameLst>
+                                          <p:attrName>style.visibility</p:attrName>
+                                        </p:attrNameLst>
+                                      </p:cBhvr>
+                                      <p:to>
+                                        <p:strVal val="visible"/>
+                                      </p:to>
+                                    </p:set>
+                                  </p:childTnLst>
+                                </p:cTn>
+                              </p:par>
+                              <p:par>
+                                <p:cTn id="11" presetID="1" presetClass="entr" presetSubtype="0" fill="hold" nodeType="withEffect">
+                                  <p:stCondLst>
+                                    <p:cond delay="0"/>
+                                  </p:stCondLst>
+                                  <p:childTnLst>
+                                    <p:set>
+                                      <p:cBhvr>
+                                        <p:cTn id="12" dur="1" fill="hold">
+                                          <p:stCondLst>
+                                            <p:cond delay="0"/>
+                                          </p:stCondLst>
+                                        </p:cTn>
+                                        <p:tgtEl>
+                                          <p:spTgt spid="5"/>
+                                        </p:tgtEl>
+                                        <p:attrNameLst>
+                                          <p:attrName>style.visibility</p:attrName>
+                                        </p:attrNameLst>
+                                      </p:cBhvr>
+                                      <p:to>
+                                        <p:strVal val="visible"/>
+                                      </p:to>
+                                    </p:set>
+                                  </p:childTnLst>
+                                </p:cTn>
+                              </p:par>
+                            </p:childTnLst>
+                          </p:cTn>
+                        </p:par>
+                      </p:childTnLst>
+                    </p:cTn>
+                  </p:par>
+                  <p:par>
+                    <p:cTn id="13" fill="hold">
+                      <p:stCondLst>
+                        <p:cond delay="indefinite"/>
+                      </p:stCondLst>
+                      <p:childTnLst>
+                        <p:par>
+                          <p:cTn id="14" fill="hold">
+                            <p:stCondLst>
+                              <p:cond delay="0"/>
+                            </p:stCondLst>
+                            <p:childTnLst>
+                              <p:par>
+                                <p:cTn id="15" presetID="1" presetClass="entr" presetSubtype="0" fill="hold" grpId="0" nodeType="clickEffect">
+                                  <p:stCondLst>
+                                    <p:cond delay="0"/>
+                                  </p:stCondLst>
+                                  <p:childTnLst>
+                                    <p:set>
+                                      <p:cBhvr>
+                                        <p:cTn id="16" dur="1" fill="hold">
+                                          <p:stCondLst>
+                                            <p:cond delay="0"/>
+                                          </p:stCondLst>
+                                        </p:cTn>
+                                        <p:tgtEl>
+                                          <p:spTgt spid="6"/>
+                                        </p:tgtEl>
+                                        <p:attrNameLst>
+                                          <p:attrName>style.visibility</p:attrName>
+                                        </p:attrNameLst>
+                                      </p:cBhvr>
+                                      <p:to>
+                                        <p:strVal val="visible"/>
+                                      </p:to>
+                                    </p:set>
+                                  </p:childTnLst>
+                                </p:cTn>
+                              </p:par>
+                            </p:childTnLst>
+                          </p:cTn>
+                        </p:par>
+                      </p:childTnLst>
+                    </p:cTn>
+                  </p:par>
+                </p:childTnLst>
+              </p:cTn>
+              <p:prevCondLst>
+                <p:cond evt="onPrev" delay="0">
+                  <p:tgtEl>
+                    <p:sldTgt/>
+                  </p:tgtEl>
+                </p:cond>
+              </p:prevCondLst>
+              <p:nextCondLst>
+                <p:cond evt="onNext" delay="0">
+                  <p:tgtEl>
+                    <p:sldTgt/>
+                  </p:tgtEl>
+                </p:cond>
+              </p:nextCondLst>
+            </p:seq>
+          </p:childTnLst>
+        </p:cTn>
+      </p:par>
+    </p:tnLst>
+    <p:bldLst>
+      <p:bldP spid="6" grpId="0" animBg="1"/>
+    </p:bldLst>
+  </p:timing>
 </p:sld>
 </file>
 
